--- a/reports/Bluestock_MF_Presentation.pptx
+++ b/reports/Bluestock_MF_Presentation.pptx
@@ -5,7 +5,7 @@
     <p:sldMasterId id="2147483673" r:id="rId1"/>
   </p:sldMasterIdLst>
   <p:notesMasterIdLst>
-    <p:notesMasterId r:id="rId21"/>
+    <p:notesMasterId r:id="rId24"/>
   </p:notesMasterIdLst>
   <p:sldIdLst>
     <p:sldId id="256" r:id="rId2"/>
@@ -25,58 +25,61 @@
     <p:sldId id="302" r:id="rId16"/>
     <p:sldId id="304" r:id="rId17"/>
     <p:sldId id="303" r:id="rId18"/>
-    <p:sldId id="266" r:id="rId19"/>
-    <p:sldId id="268" r:id="rId20"/>
+    <p:sldId id="309" r:id="rId19"/>
+    <p:sldId id="310" r:id="rId20"/>
+    <p:sldId id="311" r:id="rId21"/>
+    <p:sldId id="266" r:id="rId22"/>
+    <p:sldId id="268" r:id="rId23"/>
   </p:sldIdLst>
   <p:sldSz cx="9144000" cy="5143500" type="screen16x9"/>
   <p:notesSz cx="6858000" cy="9144000"/>
   <p:embeddedFontLst>
     <p:embeddedFont>
       <p:font typeface="Anaheim" panose="020B0604020202020204" charset="0"/>
-      <p:regular r:id="rId22"/>
-      <p:bold r:id="rId23"/>
+      <p:regular r:id="rId25"/>
+      <p:bold r:id="rId26"/>
     </p:embeddedFont>
     <p:embeddedFont>
       <p:font typeface="Archivo" panose="020B0604020202020204" charset="0"/>
-      <p:regular r:id="rId24"/>
-      <p:bold r:id="rId25"/>
-      <p:italic r:id="rId26"/>
-      <p:boldItalic r:id="rId27"/>
+      <p:regular r:id="rId27"/>
+      <p:bold r:id="rId28"/>
+      <p:italic r:id="rId29"/>
+      <p:boldItalic r:id="rId30"/>
     </p:embeddedFont>
     <p:embeddedFont>
       <p:font typeface="Calibri" panose="020F0502020204030204" pitchFamily="34" charset="0"/>
-      <p:regular r:id="rId28"/>
-      <p:bold r:id="rId29"/>
-      <p:italic r:id="rId30"/>
-      <p:boldItalic r:id="rId31"/>
+      <p:regular r:id="rId31"/>
+      <p:bold r:id="rId32"/>
+      <p:italic r:id="rId33"/>
+      <p:boldItalic r:id="rId34"/>
     </p:embeddedFont>
     <p:embeddedFont>
       <p:font typeface="Cambria" panose="02040503050406030204" pitchFamily="18" charset="0"/>
-      <p:regular r:id="rId32"/>
-      <p:bold r:id="rId33"/>
-      <p:italic r:id="rId34"/>
-      <p:boldItalic r:id="rId35"/>
+      <p:regular r:id="rId35"/>
+      <p:bold r:id="rId36"/>
+      <p:italic r:id="rId37"/>
+      <p:boldItalic r:id="rId38"/>
     </p:embeddedFont>
     <p:embeddedFont>
       <p:font typeface="Open Sans" panose="020B0604020202020204" charset="0"/>
-      <p:regular r:id="rId36"/>
-      <p:bold r:id="rId37"/>
-      <p:italic r:id="rId38"/>
-      <p:boldItalic r:id="rId39"/>
+      <p:regular r:id="rId39"/>
+      <p:bold r:id="rId40"/>
+      <p:italic r:id="rId41"/>
+      <p:boldItalic r:id="rId42"/>
     </p:embeddedFont>
     <p:embeddedFont>
       <p:font typeface="PT Sans" panose="020B0604020202020204" charset="0"/>
-      <p:regular r:id="rId40"/>
-      <p:bold r:id="rId41"/>
-      <p:italic r:id="rId42"/>
-      <p:boldItalic r:id="rId43"/>
+      <p:regular r:id="rId43"/>
+      <p:bold r:id="rId44"/>
+      <p:italic r:id="rId45"/>
+      <p:boldItalic r:id="rId46"/>
     </p:embeddedFont>
     <p:embeddedFont>
       <p:font typeface="Raleway" panose="020B0604020202020204" charset="0"/>
-      <p:regular r:id="rId44"/>
-      <p:bold r:id="rId45"/>
-      <p:italic r:id="rId46"/>
-      <p:boldItalic r:id="rId47"/>
+      <p:regular r:id="rId47"/>
+      <p:bold r:id="rId48"/>
+      <p:italic r:id="rId49"/>
+      <p:boldItalic r:id="rId50"/>
     </p:embeddedFont>
   </p:embeddedFontLst>
   <p:defaultTextStyle>
@@ -1744,7 +1747,7 @@
   <p:cSld>
     <p:spTree>
       <p:nvGrpSpPr>
-        <p:cNvPr id="1" name="Shape 268"/>
+        <p:cNvPr id="1" name="Shape 258"/>
         <p:cNvGrpSpPr/>
         <p:nvPr/>
       </p:nvGrpSpPr>
@@ -1758,7 +1761,7 @@
       </p:grpSpPr>
       <p:sp>
         <p:nvSpPr>
-          <p:cNvPr id="269" name="Google Shape;269;g278dfac31ac_0_172:notes"/>
+          <p:cNvPr id="259" name="Google Shape;259;g278dfac31ac_0_163:notes"/>
           <p:cNvSpPr>
             <a:spLocks noGrp="1" noRot="1" noChangeAspect="1"/>
           </p:cNvSpPr>
@@ -1799,7 +1802,7 @@
       </p:sp>
       <p:sp>
         <p:nvSpPr>
-          <p:cNvPr id="270" name="Google Shape;270;g278dfac31ac_0_172:notes"/>
+          <p:cNvPr id="260" name="Google Shape;260;g278dfac31ac_0_163:notes"/>
           <p:cNvSpPr txBox="1">
             <a:spLocks noGrp="1"/>
           </p:cNvSpPr>
@@ -1836,6 +1839,11 @@
         </p:txBody>
       </p:sp>
     </p:spTree>
+    <p:extLst>
+      <p:ext uri="{BB962C8B-B14F-4D97-AF65-F5344CB8AC3E}">
+        <p14:creationId xmlns:p14="http://schemas.microsoft.com/office/powerpoint/2010/main" val="2859809455"/>
+      </p:ext>
+    </p:extLst>
   </p:cSld>
   <p:clrMapOvr>
     <a:masterClrMapping/>
@@ -1848,7 +1856,7 @@
   <p:cSld>
     <p:spTree>
       <p:nvGrpSpPr>
-        <p:cNvPr id="1" name="Shape 283"/>
+        <p:cNvPr id="1" name="Shape 258"/>
         <p:cNvGrpSpPr/>
         <p:nvPr/>
       </p:nvGrpSpPr>
@@ -1862,7 +1870,7 @@
       </p:grpSpPr>
       <p:sp>
         <p:nvSpPr>
-          <p:cNvPr id="284" name="Google Shape;284;g278dfac31ac_0_190:notes"/>
+          <p:cNvPr id="259" name="Google Shape;259;g278dfac31ac_0_163:notes"/>
           <p:cNvSpPr>
             <a:spLocks noGrp="1" noRot="1" noChangeAspect="1"/>
           </p:cNvSpPr>
@@ -1903,7 +1911,7 @@
       </p:sp>
       <p:sp>
         <p:nvSpPr>
-          <p:cNvPr id="285" name="Google Shape;285;g278dfac31ac_0_190:notes"/>
+          <p:cNvPr id="260" name="Google Shape;260;g278dfac31ac_0_163:notes"/>
           <p:cNvSpPr txBox="1">
             <a:spLocks noGrp="1"/>
           </p:cNvSpPr>
@@ -1935,11 +1943,16 @@
               </a:spcAft>
               <a:buNone/>
             </a:pPr>
-            <a:endParaRPr/>
+            <a:endParaRPr dirty="0"/>
           </a:p>
         </p:txBody>
       </p:sp>
     </p:spTree>
+    <p:extLst>
+      <p:ext uri="{BB962C8B-B14F-4D97-AF65-F5344CB8AC3E}">
+        <p14:creationId xmlns:p14="http://schemas.microsoft.com/office/powerpoint/2010/main" val="3733629782"/>
+      </p:ext>
+    </p:extLst>
   </p:cSld>
   <p:clrMapOvr>
     <a:masterClrMapping/>
@@ -2008,6 +2021,323 @@
       <p:sp>
         <p:nvSpPr>
           <p:cNvPr id="147" name="Google Shape;147;g278dfac31ac_0_3:notes"/>
+          <p:cNvSpPr txBox="1">
+            <a:spLocks noGrp="1"/>
+          </p:cNvSpPr>
+          <p:nvPr>
+            <p:ph type="body" idx="1"/>
+          </p:nvPr>
+        </p:nvSpPr>
+        <p:spPr>
+          <a:xfrm>
+            <a:off x="685800" y="4343400"/>
+            <a:ext cx="5486400" cy="4114800"/>
+          </a:xfrm>
+          <a:prstGeom prst="rect">
+            <a:avLst/>
+          </a:prstGeom>
+        </p:spPr>
+        <p:txBody>
+          <a:bodyPr spcFirstLastPara="1" wrap="square" lIns="91425" tIns="91425" rIns="91425" bIns="91425" anchor="t" anchorCtr="0">
+            <a:noAutofit/>
+          </a:bodyPr>
+          <a:lstStyle/>
+          <a:p>
+            <a:pPr marL="0" lvl="0" indent="0" algn="l" rtl="0">
+              <a:spcBef>
+                <a:spcPts val="0"/>
+              </a:spcBef>
+              <a:spcAft>
+                <a:spcPts val="0"/>
+              </a:spcAft>
+              <a:buNone/>
+            </a:pPr>
+            <a:endParaRPr/>
+          </a:p>
+        </p:txBody>
+      </p:sp>
+    </p:spTree>
+  </p:cSld>
+  <p:clrMapOvr>
+    <a:masterClrMapping/>
+  </p:clrMapOvr>
+</p:notes>
+</file>
+
+<file path=ppt/notesSlides/notesSlide20.xml><?xml version="1.0" encoding="utf-8"?>
+<p:notes xmlns:a="http://schemas.openxmlformats.org/drawingml/2006/main" xmlns:r="http://schemas.openxmlformats.org/officeDocument/2006/relationships" xmlns:p="http://schemas.openxmlformats.org/presentationml/2006/main" showMasterSp="0" showMasterPhAnim="0">
+  <p:cSld>
+    <p:spTree>
+      <p:nvGrpSpPr>
+        <p:cNvPr id="1" name="Shape 258"/>
+        <p:cNvGrpSpPr/>
+        <p:nvPr/>
+      </p:nvGrpSpPr>
+      <p:grpSpPr>
+        <a:xfrm>
+          <a:off x="0" y="0"/>
+          <a:ext cx="0" cy="0"/>
+          <a:chOff x="0" y="0"/>
+          <a:chExt cx="0" cy="0"/>
+        </a:xfrm>
+      </p:grpSpPr>
+      <p:sp>
+        <p:nvSpPr>
+          <p:cNvPr id="259" name="Google Shape;259;g278dfac31ac_0_163:notes"/>
+          <p:cNvSpPr>
+            <a:spLocks noGrp="1" noRot="1" noChangeAspect="1"/>
+          </p:cNvSpPr>
+          <p:nvPr>
+            <p:ph type="sldImg" idx="2"/>
+          </p:nvPr>
+        </p:nvSpPr>
+        <p:spPr>
+          <a:xfrm>
+            <a:off x="381000" y="685800"/>
+            <a:ext cx="6096000" cy="3429000"/>
+          </a:xfrm>
+          <a:custGeom>
+            <a:avLst/>
+            <a:gdLst/>
+            <a:ahLst/>
+            <a:cxnLst/>
+            <a:rect l="l" t="t" r="r" b="b"/>
+            <a:pathLst>
+              <a:path w="120000" h="120000" extrusionOk="0">
+                <a:moveTo>
+                  <a:pt x="0" y="0"/>
+                </a:moveTo>
+                <a:lnTo>
+                  <a:pt x="120000" y="0"/>
+                </a:lnTo>
+                <a:lnTo>
+                  <a:pt x="120000" y="120000"/>
+                </a:lnTo>
+                <a:lnTo>
+                  <a:pt x="0" y="120000"/>
+                </a:lnTo>
+                <a:close/>
+              </a:path>
+            </a:pathLst>
+          </a:custGeom>
+        </p:spPr>
+      </p:sp>
+      <p:sp>
+        <p:nvSpPr>
+          <p:cNvPr id="260" name="Google Shape;260;g278dfac31ac_0_163:notes"/>
+          <p:cNvSpPr txBox="1">
+            <a:spLocks noGrp="1"/>
+          </p:cNvSpPr>
+          <p:nvPr>
+            <p:ph type="body" idx="1"/>
+          </p:nvPr>
+        </p:nvSpPr>
+        <p:spPr>
+          <a:xfrm>
+            <a:off x="685800" y="4343400"/>
+            <a:ext cx="5486400" cy="4114800"/>
+          </a:xfrm>
+          <a:prstGeom prst="rect">
+            <a:avLst/>
+          </a:prstGeom>
+        </p:spPr>
+        <p:txBody>
+          <a:bodyPr spcFirstLastPara="1" wrap="square" lIns="91425" tIns="91425" rIns="91425" bIns="91425" anchor="t" anchorCtr="0">
+            <a:noAutofit/>
+          </a:bodyPr>
+          <a:lstStyle/>
+          <a:p>
+            <a:pPr marL="0" lvl="0" indent="0" algn="l" rtl="0">
+              <a:spcBef>
+                <a:spcPts val="0"/>
+              </a:spcBef>
+              <a:spcAft>
+                <a:spcPts val="0"/>
+              </a:spcAft>
+              <a:buNone/>
+            </a:pPr>
+            <a:endParaRPr dirty="0"/>
+          </a:p>
+        </p:txBody>
+      </p:sp>
+    </p:spTree>
+    <p:extLst>
+      <p:ext uri="{BB962C8B-B14F-4D97-AF65-F5344CB8AC3E}">
+        <p14:creationId xmlns:p14="http://schemas.microsoft.com/office/powerpoint/2010/main" val="1857583688"/>
+      </p:ext>
+    </p:extLst>
+  </p:cSld>
+  <p:clrMapOvr>
+    <a:masterClrMapping/>
+  </p:clrMapOvr>
+</p:notes>
+</file>
+
+<file path=ppt/notesSlides/notesSlide21.xml><?xml version="1.0" encoding="utf-8"?>
+<p:notes xmlns:a="http://schemas.openxmlformats.org/drawingml/2006/main" xmlns:r="http://schemas.openxmlformats.org/officeDocument/2006/relationships" xmlns:p="http://schemas.openxmlformats.org/presentationml/2006/main" showMasterSp="0" showMasterPhAnim="0">
+  <p:cSld>
+    <p:spTree>
+      <p:nvGrpSpPr>
+        <p:cNvPr id="1" name="Shape 268"/>
+        <p:cNvGrpSpPr/>
+        <p:nvPr/>
+      </p:nvGrpSpPr>
+      <p:grpSpPr>
+        <a:xfrm>
+          <a:off x="0" y="0"/>
+          <a:ext cx="0" cy="0"/>
+          <a:chOff x="0" y="0"/>
+          <a:chExt cx="0" cy="0"/>
+        </a:xfrm>
+      </p:grpSpPr>
+      <p:sp>
+        <p:nvSpPr>
+          <p:cNvPr id="269" name="Google Shape;269;g278dfac31ac_0_172:notes"/>
+          <p:cNvSpPr>
+            <a:spLocks noGrp="1" noRot="1" noChangeAspect="1"/>
+          </p:cNvSpPr>
+          <p:nvPr>
+            <p:ph type="sldImg" idx="2"/>
+          </p:nvPr>
+        </p:nvSpPr>
+        <p:spPr>
+          <a:xfrm>
+            <a:off x="381000" y="685800"/>
+            <a:ext cx="6096000" cy="3429000"/>
+          </a:xfrm>
+          <a:custGeom>
+            <a:avLst/>
+            <a:gdLst/>
+            <a:ahLst/>
+            <a:cxnLst/>
+            <a:rect l="l" t="t" r="r" b="b"/>
+            <a:pathLst>
+              <a:path w="120000" h="120000" extrusionOk="0">
+                <a:moveTo>
+                  <a:pt x="0" y="0"/>
+                </a:moveTo>
+                <a:lnTo>
+                  <a:pt x="120000" y="0"/>
+                </a:lnTo>
+                <a:lnTo>
+                  <a:pt x="120000" y="120000"/>
+                </a:lnTo>
+                <a:lnTo>
+                  <a:pt x="0" y="120000"/>
+                </a:lnTo>
+                <a:close/>
+              </a:path>
+            </a:pathLst>
+          </a:custGeom>
+        </p:spPr>
+      </p:sp>
+      <p:sp>
+        <p:nvSpPr>
+          <p:cNvPr id="270" name="Google Shape;270;g278dfac31ac_0_172:notes"/>
+          <p:cNvSpPr txBox="1">
+            <a:spLocks noGrp="1"/>
+          </p:cNvSpPr>
+          <p:nvPr>
+            <p:ph type="body" idx="1"/>
+          </p:nvPr>
+        </p:nvSpPr>
+        <p:spPr>
+          <a:xfrm>
+            <a:off x="685800" y="4343400"/>
+            <a:ext cx="5486400" cy="4114800"/>
+          </a:xfrm>
+          <a:prstGeom prst="rect">
+            <a:avLst/>
+          </a:prstGeom>
+        </p:spPr>
+        <p:txBody>
+          <a:bodyPr spcFirstLastPara="1" wrap="square" lIns="91425" tIns="91425" rIns="91425" bIns="91425" anchor="t" anchorCtr="0">
+            <a:noAutofit/>
+          </a:bodyPr>
+          <a:lstStyle/>
+          <a:p>
+            <a:pPr marL="0" lvl="0" indent="0" algn="l" rtl="0">
+              <a:spcBef>
+                <a:spcPts val="0"/>
+              </a:spcBef>
+              <a:spcAft>
+                <a:spcPts val="0"/>
+              </a:spcAft>
+              <a:buNone/>
+            </a:pPr>
+            <a:endParaRPr/>
+          </a:p>
+        </p:txBody>
+      </p:sp>
+    </p:spTree>
+  </p:cSld>
+  <p:clrMapOvr>
+    <a:masterClrMapping/>
+  </p:clrMapOvr>
+</p:notes>
+</file>
+
+<file path=ppt/notesSlides/notesSlide22.xml><?xml version="1.0" encoding="utf-8"?>
+<p:notes xmlns:a="http://schemas.openxmlformats.org/drawingml/2006/main" xmlns:r="http://schemas.openxmlformats.org/officeDocument/2006/relationships" xmlns:p="http://schemas.openxmlformats.org/presentationml/2006/main" showMasterSp="0" showMasterPhAnim="0">
+  <p:cSld>
+    <p:spTree>
+      <p:nvGrpSpPr>
+        <p:cNvPr id="1" name="Shape 283"/>
+        <p:cNvGrpSpPr/>
+        <p:nvPr/>
+      </p:nvGrpSpPr>
+      <p:grpSpPr>
+        <a:xfrm>
+          <a:off x="0" y="0"/>
+          <a:ext cx="0" cy="0"/>
+          <a:chOff x="0" y="0"/>
+          <a:chExt cx="0" cy="0"/>
+        </a:xfrm>
+      </p:grpSpPr>
+      <p:sp>
+        <p:nvSpPr>
+          <p:cNvPr id="284" name="Google Shape;284;g278dfac31ac_0_190:notes"/>
+          <p:cNvSpPr>
+            <a:spLocks noGrp="1" noRot="1" noChangeAspect="1"/>
+          </p:cNvSpPr>
+          <p:nvPr>
+            <p:ph type="sldImg" idx="2"/>
+          </p:nvPr>
+        </p:nvSpPr>
+        <p:spPr>
+          <a:xfrm>
+            <a:off x="381000" y="685800"/>
+            <a:ext cx="6096000" cy="3429000"/>
+          </a:xfrm>
+          <a:custGeom>
+            <a:avLst/>
+            <a:gdLst/>
+            <a:ahLst/>
+            <a:cxnLst/>
+            <a:rect l="l" t="t" r="r" b="b"/>
+            <a:pathLst>
+              <a:path w="120000" h="120000" extrusionOk="0">
+                <a:moveTo>
+                  <a:pt x="0" y="0"/>
+                </a:moveTo>
+                <a:lnTo>
+                  <a:pt x="120000" y="0"/>
+                </a:lnTo>
+                <a:lnTo>
+                  <a:pt x="120000" y="120000"/>
+                </a:lnTo>
+                <a:lnTo>
+                  <a:pt x="0" y="120000"/>
+                </a:lnTo>
+                <a:close/>
+              </a:path>
+            </a:pathLst>
+          </a:custGeom>
+        </p:spPr>
+      </p:sp>
+      <p:sp>
+        <p:nvSpPr>
+          <p:cNvPr id="285" name="Google Shape;285;g278dfac31ac_0_190:notes"/>
           <p:cNvSpPr txBox="1">
             <a:spLocks noGrp="1"/>
           </p:cNvSpPr>
@@ -18892,6 +19222,2224 @@
   <p:cSld>
     <p:spTree>
       <p:nvGrpSpPr>
+        <p:cNvPr id="1" name="Shape 261"/>
+        <p:cNvGrpSpPr/>
+        <p:nvPr/>
+      </p:nvGrpSpPr>
+      <p:grpSpPr>
+        <a:xfrm>
+          <a:off x="0" y="0"/>
+          <a:ext cx="0" cy="0"/>
+          <a:chOff x="0" y="0"/>
+          <a:chExt cx="0" cy="0"/>
+        </a:xfrm>
+      </p:grpSpPr>
+      <p:sp>
+        <p:nvSpPr>
+          <p:cNvPr id="31" name="Shape 14">
+            <a:extLst>
+              <a:ext uri="{FF2B5EF4-FFF2-40B4-BE49-F238E27FC236}">
+                <a16:creationId xmlns:a16="http://schemas.microsoft.com/office/drawing/2014/main" id="{B64F30E1-4DA8-4D25-8840-CC037588C6B9}"/>
+              </a:ext>
+            </a:extLst>
+          </p:cNvPr>
+          <p:cNvSpPr/>
+          <p:nvPr/>
+        </p:nvSpPr>
+        <p:spPr>
+          <a:xfrm>
+            <a:off x="365760" y="2194714"/>
+            <a:ext cx="8412480" cy="2596583"/>
+          </a:xfrm>
+          <a:prstGeom prst="roundRect">
+            <a:avLst>
+              <a:gd name="adj" fmla="val 2857"/>
+            </a:avLst>
+          </a:prstGeom>
+          <a:solidFill>
+            <a:srgbClr val="D6C4B4"/>
+          </a:solidFill>
+          <a:ln/>
+          <a:effectLst>
+            <a:outerShdw blurRad="101600" dist="38100" dir="2700000" algn="bl" rotWithShape="0">
+              <a:srgbClr val="000000">
+                <a:alpha val="18000"/>
+              </a:srgbClr>
+            </a:outerShdw>
+          </a:effectLst>
+        </p:spPr>
+      </p:sp>
+      <p:sp>
+        <p:nvSpPr>
+          <p:cNvPr id="20" name="Google Shape;245;p36">
+            <a:extLst>
+              <a:ext uri="{FF2B5EF4-FFF2-40B4-BE49-F238E27FC236}">
+                <a16:creationId xmlns:a16="http://schemas.microsoft.com/office/drawing/2014/main" id="{BCCF65BE-86D9-49C1-AC10-145D0EAF1335}"/>
+              </a:ext>
+            </a:extLst>
+          </p:cNvPr>
+          <p:cNvSpPr txBox="1">
+            <a:spLocks noGrp="1"/>
+          </p:cNvSpPr>
+          <p:nvPr>
+            <p:ph type="title"/>
+          </p:nvPr>
+        </p:nvSpPr>
+        <p:spPr>
+          <a:xfrm>
+            <a:off x="720000" y="398050"/>
+            <a:ext cx="7704000" cy="702000"/>
+          </a:xfrm>
+          <a:prstGeom prst="rect">
+            <a:avLst/>
+          </a:prstGeom>
+        </p:spPr>
+        <p:txBody>
+          <a:bodyPr spcFirstLastPara="1" wrap="square" lIns="91425" tIns="91425" rIns="91425" bIns="91425" anchor="ctr" anchorCtr="0">
+            <a:noAutofit/>
+          </a:bodyPr>
+          <a:lstStyle/>
+          <a:p>
+            <a:pPr marL="0" lvl="0" indent="0" algn="l" rtl="0">
+              <a:spcBef>
+                <a:spcPts val="0"/>
+              </a:spcBef>
+              <a:spcAft>
+                <a:spcPts val="0"/>
+              </a:spcAft>
+              <a:buNone/>
+            </a:pPr>
+            <a:r>
+              <a:rPr lang="en-IN" sz="2500" dirty="0"/>
+              <a:t>BONUS DELIVERABLE – AUTOMATED EMAIL</a:t>
+            </a:r>
+          </a:p>
+        </p:txBody>
+      </p:sp>
+      <p:sp>
+        <p:nvSpPr>
+          <p:cNvPr id="21" name="Shape 7">
+            <a:extLst>
+              <a:ext uri="{FF2B5EF4-FFF2-40B4-BE49-F238E27FC236}">
+                <a16:creationId xmlns:a16="http://schemas.microsoft.com/office/drawing/2014/main" id="{8175D6AF-48D3-4888-B5A8-83523538E2A3}"/>
+              </a:ext>
+            </a:extLst>
+          </p:cNvPr>
+          <p:cNvSpPr/>
+          <p:nvPr/>
+        </p:nvSpPr>
+        <p:spPr>
+          <a:xfrm>
+            <a:off x="1633625" y="1362610"/>
+            <a:ext cx="6142616" cy="658368"/>
+          </a:xfrm>
+          <a:prstGeom prst="roundRect">
+            <a:avLst>
+              <a:gd name="adj" fmla="val 9722"/>
+            </a:avLst>
+          </a:prstGeom>
+          <a:solidFill>
+            <a:srgbClr val="FFFFFF"/>
+          </a:solidFill>
+          <a:ln/>
+          <a:effectLst>
+            <a:outerShdw blurRad="101600" dist="38100" dir="2700000" algn="bl" rotWithShape="0">
+              <a:srgbClr val="000000">
+                <a:alpha val="18000"/>
+              </a:srgbClr>
+            </a:outerShdw>
+          </a:effectLst>
+        </p:spPr>
+      </p:sp>
+      <p:sp>
+        <p:nvSpPr>
+          <p:cNvPr id="22" name="Shape 8">
+            <a:extLst>
+              <a:ext uri="{FF2B5EF4-FFF2-40B4-BE49-F238E27FC236}">
+                <a16:creationId xmlns:a16="http://schemas.microsoft.com/office/drawing/2014/main" id="{B112E886-563F-4F39-A172-BE7EF286BF73}"/>
+              </a:ext>
+            </a:extLst>
+          </p:cNvPr>
+          <p:cNvSpPr/>
+          <p:nvPr/>
+        </p:nvSpPr>
+        <p:spPr>
+          <a:xfrm>
+            <a:off x="1633625" y="1362610"/>
+            <a:ext cx="658368" cy="658368"/>
+          </a:xfrm>
+          <a:prstGeom prst="roundRect">
+            <a:avLst>
+              <a:gd name="adj" fmla="val 9722"/>
+            </a:avLst>
+          </a:prstGeom>
+          <a:solidFill>
+            <a:schemeClr val="tx2">
+              <a:lumMod val="75000"/>
+            </a:schemeClr>
+          </a:solidFill>
+          <a:ln/>
+        </p:spPr>
+      </p:sp>
+      <p:sp>
+        <p:nvSpPr>
+          <p:cNvPr id="23" name="Text 9">
+            <a:extLst>
+              <a:ext uri="{FF2B5EF4-FFF2-40B4-BE49-F238E27FC236}">
+                <a16:creationId xmlns:a16="http://schemas.microsoft.com/office/drawing/2014/main" id="{9BC1B9C4-C46A-4BE2-8625-820F633C17CA}"/>
+              </a:ext>
+            </a:extLst>
+          </p:cNvPr>
+          <p:cNvSpPr/>
+          <p:nvPr/>
+        </p:nvSpPr>
+        <p:spPr>
+          <a:xfrm>
+            <a:off x="1633625" y="1527202"/>
+            <a:ext cx="658368" cy="320040"/>
+          </a:xfrm>
+          <a:prstGeom prst="rect">
+            <a:avLst/>
+          </a:prstGeom>
+          <a:noFill/>
+          <a:ln/>
+        </p:spPr>
+        <p:txBody>
+          <a:bodyPr wrap="square" lIns="0" tIns="0" rIns="0" bIns="0" rtlCol="0" anchor="ctr"/>
+          <a:lstStyle/>
+          <a:p>
+            <a:pPr marL="0" indent="0" algn="ctr">
+              <a:buNone/>
+            </a:pPr>
+            <a:r>
+              <a:rPr lang="en-US" sz="1200" b="1" dirty="0">
+                <a:solidFill>
+                  <a:srgbClr val="FFFFFF"/>
+                </a:solidFill>
+                <a:latin typeface="Calibri" pitchFamily="34" charset="0"/>
+                <a:ea typeface="Calibri" pitchFamily="34" charset="-122"/>
+                <a:cs typeface="Calibri" pitchFamily="34" charset="-120"/>
+              </a:rPr>
+              <a:t>B5</a:t>
+            </a:r>
+            <a:endParaRPr lang="en-US" sz="1200" dirty="0"/>
+          </a:p>
+        </p:txBody>
+      </p:sp>
+      <p:sp>
+        <p:nvSpPr>
+          <p:cNvPr id="24" name="Text 10">
+            <a:extLst>
+              <a:ext uri="{FF2B5EF4-FFF2-40B4-BE49-F238E27FC236}">
+                <a16:creationId xmlns:a16="http://schemas.microsoft.com/office/drawing/2014/main" id="{686B51F8-9E1B-4785-A5A3-F7EC3DFEDA0A}"/>
+              </a:ext>
+            </a:extLst>
+          </p:cNvPr>
+          <p:cNvSpPr/>
+          <p:nvPr/>
+        </p:nvSpPr>
+        <p:spPr>
+          <a:xfrm>
+            <a:off x="2476716" y="1527202"/>
+            <a:ext cx="3877979" cy="320040"/>
+          </a:xfrm>
+          <a:prstGeom prst="rect">
+            <a:avLst/>
+          </a:prstGeom>
+          <a:noFill/>
+          <a:ln/>
+        </p:spPr>
+        <p:txBody>
+          <a:bodyPr wrap="square" lIns="0" tIns="0" rIns="0" bIns="0" rtlCol="0" anchor="ctr"/>
+          <a:lstStyle/>
+          <a:p>
+            <a:pPr marL="0" indent="0">
+              <a:buNone/>
+            </a:pPr>
+            <a:r>
+              <a:rPr lang="en-IN" sz="1200" b="1" dirty="0">
+                <a:latin typeface="Calibri" panose="020F0502020204030204" pitchFamily="34" charset="0"/>
+                <a:ea typeface="Calibri" panose="020F0502020204030204" pitchFamily="34" charset="0"/>
+                <a:cs typeface="Calibri" panose="020F0502020204030204" pitchFamily="34" charset="0"/>
+              </a:rPr>
+              <a:t>Automated HTML Email Report</a:t>
+            </a:r>
+            <a:endParaRPr lang="en-US" sz="1300" b="1" dirty="0">
+              <a:latin typeface="Calibri" panose="020F0502020204030204" pitchFamily="34" charset="0"/>
+              <a:ea typeface="Calibri" panose="020F0502020204030204" pitchFamily="34" charset="0"/>
+              <a:cs typeface="Calibri" panose="020F0502020204030204" pitchFamily="34" charset="0"/>
+            </a:endParaRPr>
+          </a:p>
+        </p:txBody>
+      </p:sp>
+      <p:sp>
+        <p:nvSpPr>
+          <p:cNvPr id="4" name="Rectangle 3">
+            <a:extLst>
+              <a:ext uri="{FF2B5EF4-FFF2-40B4-BE49-F238E27FC236}">
+                <a16:creationId xmlns:a16="http://schemas.microsoft.com/office/drawing/2014/main" id="{555BFF9F-439C-4DD2-A0E1-F7D2D5097751}"/>
+              </a:ext>
+            </a:extLst>
+          </p:cNvPr>
+          <p:cNvSpPr>
+            <a:spLocks noChangeArrowheads="1"/>
+          </p:cNvSpPr>
+          <p:nvPr/>
+        </p:nvSpPr>
+        <p:spPr bwMode="auto">
+          <a:xfrm>
+            <a:off x="2291993" y="2011834"/>
+            <a:ext cx="5593976" cy="1331070"/>
+          </a:xfrm>
+          <a:prstGeom prst="rect">
+            <a:avLst/>
+          </a:prstGeom>
+          <a:noFill/>
+          <a:ln>
+            <a:noFill/>
+          </a:ln>
+          <a:effectLst/>
+          <a:extLst>
+            <a:ext uri="{909E8E84-426E-40DD-AFC4-6F175D3DCCD1}">
+              <a14:hiddenFill xmlns:a14="http://schemas.microsoft.com/office/drawing/2010/main">
+                <a:solidFill>
+                  <a:schemeClr val="accent1"/>
+                </a:solidFill>
+              </a14:hiddenFill>
+            </a:ext>
+            <a:ext uri="{91240B29-F687-4F45-9708-019B960494DF}">
+              <a14:hiddenLine xmlns:a14="http://schemas.microsoft.com/office/drawing/2010/main" w="9525">
+                <a:solidFill>
+                  <a:schemeClr val="tx1"/>
+                </a:solidFill>
+                <a:miter lim="800000"/>
+                <a:headEnd/>
+                <a:tailEnd/>
+              </a14:hiddenLine>
+            </a:ext>
+            <a:ext uri="{AF507438-7753-43E0-B8FC-AC1667EBCBE1}">
+              <a14:hiddenEffects xmlns:a14="http://schemas.microsoft.com/office/drawing/2010/main">
+                <a:effectLst>
+                  <a:outerShdw dist="35921" dir="2700000" algn="ctr" rotWithShape="0">
+                    <a:schemeClr val="bg2"/>
+                  </a:outerShdw>
+                </a:effectLst>
+              </a14:hiddenEffects>
+            </a:ext>
+          </a:extLst>
+        </p:spPr>
+        <p:txBody>
+          <a:bodyPr vert="horz" wrap="square" lIns="91440" tIns="45720" rIns="91440" bIns="45720" numCol="1" anchor="ctr" anchorCtr="0" compatLnSpc="1">
+            <a:prstTxWarp prst="textNoShape">
+              <a:avLst/>
+            </a:prstTxWarp>
+            <a:spAutoFit/>
+          </a:bodyPr>
+          <a:lstStyle/>
+          <a:p>
+            <a:pPr marL="228600" marR="0" lvl="0" indent="-228600" algn="l" defTabSz="914400" rtl="0" eaLnBrk="0" fontAlgn="base" latinLnBrk="0" hangingPunct="0">
+              <a:lnSpc>
+                <a:spcPct val="150000"/>
+              </a:lnSpc>
+              <a:spcBef>
+                <a:spcPct val="0"/>
+              </a:spcBef>
+              <a:spcAft>
+                <a:spcPct val="0"/>
+              </a:spcAft>
+              <a:buClrTx/>
+              <a:buSzTx/>
+              <a:buFont typeface="+mj-lt"/>
+              <a:buAutoNum type="arabicPeriod"/>
+              <a:tabLst/>
+            </a:pPr>
+            <a:endParaRPr kumimoji="0" lang="en-US" altLang="en-US" sz="1100" b="0" i="0" u="none" strike="noStrike" cap="none" normalizeH="0" baseline="0" dirty="0">
+              <a:ln>
+                <a:noFill/>
+              </a:ln>
+              <a:solidFill>
+                <a:schemeClr val="tx1"/>
+              </a:solidFill>
+              <a:effectLst/>
+              <a:latin typeface="Archivo" panose="020B0604020202020204" charset="0"/>
+              <a:cs typeface="Archivo" panose="020B0604020202020204" charset="0"/>
+            </a:endParaRPr>
+          </a:p>
+          <a:p>
+            <a:pPr marL="228600" marR="0" lvl="0" indent="-228600" algn="l" defTabSz="914400" rtl="0" eaLnBrk="0" fontAlgn="base" latinLnBrk="0" hangingPunct="0">
+              <a:lnSpc>
+                <a:spcPct val="150000"/>
+              </a:lnSpc>
+              <a:spcBef>
+                <a:spcPct val="0"/>
+              </a:spcBef>
+              <a:spcAft>
+                <a:spcPct val="0"/>
+              </a:spcAft>
+              <a:buClrTx/>
+              <a:buSzTx/>
+              <a:buFont typeface="+mj-lt"/>
+              <a:buAutoNum type="arabicPeriod"/>
+              <a:tabLst/>
+            </a:pPr>
+            <a:r>
+              <a:rPr kumimoji="0" lang="en-US" altLang="en-US" sz="1100" b="0" i="0" u="none" strike="noStrike" cap="none" normalizeH="0" baseline="0" dirty="0">
+                <a:ln>
+                  <a:noFill/>
+                </a:ln>
+                <a:solidFill>
+                  <a:schemeClr val="tx1"/>
+                </a:solidFill>
+                <a:effectLst/>
+                <a:latin typeface="Archivo" panose="020B0604020202020204" charset="0"/>
+                <a:cs typeface="Archivo" panose="020B0604020202020204" charset="0"/>
+              </a:rPr>
+              <a:t>Reads live from cleaned CSVs  fully data-driven, zero hardcoding </a:t>
+            </a:r>
+          </a:p>
+          <a:p>
+            <a:pPr marL="228600" marR="0" lvl="0" indent="-228600" algn="l" defTabSz="914400" rtl="0" eaLnBrk="0" fontAlgn="base" latinLnBrk="0" hangingPunct="0">
+              <a:lnSpc>
+                <a:spcPct val="150000"/>
+              </a:lnSpc>
+              <a:spcBef>
+                <a:spcPct val="0"/>
+              </a:spcBef>
+              <a:spcAft>
+                <a:spcPct val="0"/>
+              </a:spcAft>
+              <a:buClrTx/>
+              <a:buSzTx/>
+              <a:buFont typeface="+mj-lt"/>
+              <a:buAutoNum type="arabicPeriod"/>
+              <a:tabLst/>
+            </a:pPr>
+            <a:r>
+              <a:rPr kumimoji="0" lang="en-US" altLang="en-US" sz="1100" b="0" i="0" u="none" strike="noStrike" cap="none" normalizeH="0" baseline="0" dirty="0">
+                <a:ln>
+                  <a:noFill/>
+                </a:ln>
+                <a:solidFill>
+                  <a:schemeClr val="tx1"/>
+                </a:solidFill>
+                <a:effectLst/>
+                <a:latin typeface="Archivo" panose="020B0604020202020204" charset="0"/>
+                <a:cs typeface="Archivo" panose="020B0604020202020204" charset="0"/>
+              </a:rPr>
+              <a:t>Generates branded HTML with KPI cards, fund table and insights </a:t>
+            </a:r>
+          </a:p>
+          <a:p>
+            <a:pPr marL="228600" marR="0" lvl="0" indent="-228600" algn="l" defTabSz="914400" rtl="0" eaLnBrk="0" fontAlgn="base" latinLnBrk="0" hangingPunct="0">
+              <a:lnSpc>
+                <a:spcPct val="150000"/>
+              </a:lnSpc>
+              <a:spcBef>
+                <a:spcPct val="0"/>
+              </a:spcBef>
+              <a:spcAft>
+                <a:spcPct val="0"/>
+              </a:spcAft>
+              <a:buClrTx/>
+              <a:buSzTx/>
+              <a:buFont typeface="+mj-lt"/>
+              <a:buAutoNum type="arabicPeriod"/>
+              <a:tabLst/>
+            </a:pPr>
+            <a:r>
+              <a:rPr kumimoji="0" lang="en-US" altLang="en-US" sz="1100" b="0" i="0" u="none" strike="noStrike" cap="none" normalizeH="0" baseline="0" dirty="0">
+                <a:ln>
+                  <a:noFill/>
+                </a:ln>
+                <a:solidFill>
+                  <a:schemeClr val="tx1"/>
+                </a:solidFill>
+                <a:effectLst/>
+                <a:latin typeface="Archivo" panose="020B0604020202020204" charset="0"/>
+                <a:cs typeface="Archivo" panose="020B0604020202020204" charset="0"/>
+              </a:rPr>
+              <a:t>Complete SMTP delivery block with Gmail TLS and weekly schedule </a:t>
+            </a:r>
+          </a:p>
+          <a:p>
+            <a:pPr marL="228600" marR="0" lvl="0" indent="-228600" algn="l" defTabSz="914400" rtl="0" eaLnBrk="0" fontAlgn="base" latinLnBrk="0" hangingPunct="0">
+              <a:lnSpc>
+                <a:spcPct val="150000"/>
+              </a:lnSpc>
+              <a:spcBef>
+                <a:spcPct val="0"/>
+              </a:spcBef>
+              <a:spcAft>
+                <a:spcPct val="0"/>
+              </a:spcAft>
+              <a:buClrTx/>
+              <a:buSzTx/>
+              <a:buFont typeface="+mj-lt"/>
+              <a:buAutoNum type="arabicPeriod"/>
+              <a:tabLst/>
+            </a:pPr>
+            <a:r>
+              <a:rPr kumimoji="0" lang="en-US" altLang="en-US" sz="1100" b="0" i="0" u="none" strike="noStrike" cap="none" normalizeH="0" baseline="0" dirty="0">
+                <a:ln>
+                  <a:noFill/>
+                </a:ln>
+                <a:solidFill>
+                  <a:schemeClr val="tx1"/>
+                </a:solidFill>
+                <a:effectLst/>
+                <a:latin typeface="Archivo" panose="020B0604020202020204" charset="0"/>
+                <a:cs typeface="Archivo" panose="020B0604020202020204" charset="0"/>
+              </a:rPr>
+              <a:t>Browser preview confirms rendering before live email deployment </a:t>
+            </a:r>
+          </a:p>
+        </p:txBody>
+      </p:sp>
+      <p:sp>
+        <p:nvSpPr>
+          <p:cNvPr id="5" name="Rectangle 4">
+            <a:extLst>
+              <a:ext uri="{FF2B5EF4-FFF2-40B4-BE49-F238E27FC236}">
+                <a16:creationId xmlns:a16="http://schemas.microsoft.com/office/drawing/2014/main" id="{201F9E49-87A2-4CA8-9937-1810FA1164F6}"/>
+              </a:ext>
+            </a:extLst>
+          </p:cNvPr>
+          <p:cNvSpPr>
+            <a:spLocks noChangeArrowheads="1"/>
+          </p:cNvSpPr>
+          <p:nvPr/>
+        </p:nvSpPr>
+        <p:spPr bwMode="auto">
+          <a:xfrm>
+            <a:off x="768255" y="3408763"/>
+            <a:ext cx="7728601" cy="1166730"/>
+          </a:xfrm>
+          <a:prstGeom prst="rect">
+            <a:avLst/>
+          </a:prstGeom>
+          <a:noFill/>
+          <a:ln>
+            <a:noFill/>
+          </a:ln>
+          <a:effectLst/>
+          <a:extLst>
+            <a:ext uri="{909E8E84-426E-40DD-AFC4-6F175D3DCCD1}">
+              <a14:hiddenFill xmlns:a14="http://schemas.microsoft.com/office/drawing/2010/main">
+                <a:solidFill>
+                  <a:schemeClr val="accent1"/>
+                </a:solidFill>
+              </a14:hiddenFill>
+            </a:ext>
+            <a:ext uri="{91240B29-F687-4F45-9708-019B960494DF}">
+              <a14:hiddenLine xmlns:a14="http://schemas.microsoft.com/office/drawing/2010/main" w="9525">
+                <a:solidFill>
+                  <a:schemeClr val="tx1"/>
+                </a:solidFill>
+                <a:miter lim="800000"/>
+                <a:headEnd/>
+                <a:tailEnd/>
+              </a14:hiddenLine>
+            </a:ext>
+            <a:ext uri="{AF507438-7753-43E0-B8FC-AC1667EBCBE1}">
+              <a14:hiddenEffects xmlns:a14="http://schemas.microsoft.com/office/drawing/2010/main">
+                <a:effectLst>
+                  <a:outerShdw dist="35921" dir="2700000" algn="ctr" rotWithShape="0">
+                    <a:schemeClr val="bg2"/>
+                  </a:outerShdw>
+                </a:effectLst>
+              </a14:hiddenEffects>
+            </a:ext>
+          </a:extLst>
+        </p:spPr>
+        <p:txBody>
+          <a:bodyPr vert="horz" wrap="square" lIns="91440" tIns="45720" rIns="91440" bIns="45720" numCol="1" anchor="ctr" anchorCtr="0" compatLnSpc="1">
+            <a:prstTxWarp prst="textNoShape">
+              <a:avLst/>
+            </a:prstTxWarp>
+            <a:spAutoFit/>
+          </a:bodyPr>
+          <a:lstStyle/>
+          <a:p>
+            <a:pPr marL="0" marR="0" lvl="0" indent="0" algn="just" defTabSz="914400" rtl="0" eaLnBrk="0" fontAlgn="base" latinLnBrk="0" hangingPunct="0">
+              <a:lnSpc>
+                <a:spcPct val="150000"/>
+              </a:lnSpc>
+              <a:spcBef>
+                <a:spcPct val="0"/>
+              </a:spcBef>
+              <a:spcAft>
+                <a:spcPct val="0"/>
+              </a:spcAft>
+              <a:buClrTx/>
+              <a:buSzTx/>
+              <a:buFontTx/>
+              <a:buNone/>
+              <a:tabLst/>
+            </a:pPr>
+            <a:r>
+              <a:rPr kumimoji="0" lang="en-US" altLang="en-US" sz="1200" b="0" i="0" u="none" strike="noStrike" cap="none" normalizeH="0" baseline="0" dirty="0">
+                <a:ln>
+                  <a:noFill/>
+                </a:ln>
+                <a:solidFill>
+                  <a:schemeClr val="tx1"/>
+                </a:solidFill>
+                <a:effectLst/>
+                <a:latin typeface="Archivo" panose="020B0604020202020204" charset="0"/>
+                <a:cs typeface="Archivo" panose="020B0604020202020204" charset="0"/>
+              </a:rPr>
+              <a:t>For email delivery, the script contains a complete SMTP configuration block using Python's </a:t>
+            </a:r>
+            <a:r>
+              <a:rPr kumimoji="0" lang="en-US" altLang="en-US" sz="1200" b="0" i="0" u="none" strike="noStrike" cap="none" normalizeH="0" baseline="0" dirty="0" err="1">
+                <a:ln>
+                  <a:noFill/>
+                </a:ln>
+                <a:solidFill>
+                  <a:schemeClr val="tx1"/>
+                </a:solidFill>
+                <a:effectLst/>
+                <a:latin typeface="Archivo" panose="020B0604020202020204" charset="0"/>
+                <a:cs typeface="Archivo" panose="020B0604020202020204" charset="0"/>
+              </a:rPr>
+              <a:t>smtplib</a:t>
+            </a:r>
+            <a:r>
+              <a:rPr kumimoji="0" lang="en-US" altLang="en-US" sz="1200" b="0" i="0" u="none" strike="noStrike" cap="none" normalizeH="0" baseline="0" dirty="0">
+                <a:ln>
+                  <a:noFill/>
+                </a:ln>
+                <a:solidFill>
+                  <a:schemeClr val="tx1"/>
+                </a:solidFill>
+                <a:effectLst/>
+                <a:latin typeface="Archivo" panose="020B0604020202020204" charset="0"/>
+                <a:cs typeface="Archivo" panose="020B0604020202020204" charset="0"/>
+              </a:rPr>
+              <a:t> with Gmail TLS authentication. The schedule library triggers delivery every Monday at 08:00 automatically. Credentials are kept outside the codebase for security. During development, the report is previewed instantly by opening in the default browser  confirming accurate rendering before live deployment. </a:t>
+            </a:r>
+          </a:p>
+        </p:txBody>
+      </p:sp>
+    </p:spTree>
+    <p:extLst>
+      <p:ext uri="{BB962C8B-B14F-4D97-AF65-F5344CB8AC3E}">
+        <p14:creationId xmlns:p14="http://schemas.microsoft.com/office/powerpoint/2010/main" val="1179629396"/>
+      </p:ext>
+    </p:extLst>
+  </p:cSld>
+  <p:clrMapOvr>
+    <a:masterClrMapping/>
+  </p:clrMapOvr>
+</p:sld>
+</file>
+
+<file path=ppt/slides/slide19.xml><?xml version="1.0" encoding="utf-8"?>
+<p:sld xmlns:a="http://schemas.openxmlformats.org/drawingml/2006/main" xmlns:r="http://schemas.openxmlformats.org/officeDocument/2006/relationships" xmlns:p="http://schemas.openxmlformats.org/presentationml/2006/main">
+  <p:cSld>
+    <p:spTree>
+      <p:nvGrpSpPr>
+        <p:cNvPr id="1" name="Shape 261"/>
+        <p:cNvGrpSpPr/>
+        <p:nvPr/>
+      </p:nvGrpSpPr>
+      <p:grpSpPr>
+        <a:xfrm>
+          <a:off x="0" y="0"/>
+          <a:ext cx="0" cy="0"/>
+          <a:chOff x="0" y="0"/>
+          <a:chExt cx="0" cy="0"/>
+        </a:xfrm>
+      </p:grpSpPr>
+      <p:grpSp>
+        <p:nvGrpSpPr>
+          <p:cNvPr id="7" name="Group 6">
+            <a:extLst>
+              <a:ext uri="{FF2B5EF4-FFF2-40B4-BE49-F238E27FC236}">
+                <a16:creationId xmlns:a16="http://schemas.microsoft.com/office/drawing/2014/main" id="{C8E149EB-AB2D-4B07-A020-0056E99EE67E}"/>
+              </a:ext>
+            </a:extLst>
+          </p:cNvPr>
+          <p:cNvGrpSpPr/>
+          <p:nvPr/>
+        </p:nvGrpSpPr>
+        <p:grpSpPr>
+          <a:xfrm>
+            <a:off x="508842" y="179269"/>
+            <a:ext cx="8126315" cy="658368"/>
+            <a:chOff x="219761" y="233057"/>
+            <a:chExt cx="8415396" cy="658368"/>
+          </a:xfrm>
+        </p:grpSpPr>
+        <p:sp>
+          <p:nvSpPr>
+            <p:cNvPr id="21" name="Shape 7">
+              <a:extLst>
+                <a:ext uri="{FF2B5EF4-FFF2-40B4-BE49-F238E27FC236}">
+                  <a16:creationId xmlns:a16="http://schemas.microsoft.com/office/drawing/2014/main" id="{8175D6AF-48D3-4888-B5A8-83523538E2A3}"/>
+                </a:ext>
+              </a:extLst>
+            </p:cNvPr>
+            <p:cNvSpPr/>
+            <p:nvPr/>
+          </p:nvSpPr>
+          <p:spPr>
+            <a:xfrm>
+              <a:off x="219762" y="233057"/>
+              <a:ext cx="8415395" cy="658368"/>
+            </a:xfrm>
+            <a:prstGeom prst="roundRect">
+              <a:avLst>
+                <a:gd name="adj" fmla="val 9722"/>
+              </a:avLst>
+            </a:prstGeom>
+            <a:solidFill>
+              <a:srgbClr val="FFFFFF"/>
+            </a:solidFill>
+            <a:ln/>
+            <a:effectLst>
+              <a:outerShdw blurRad="101600" dist="38100" dir="2700000" algn="bl" rotWithShape="0">
+                <a:srgbClr val="000000">
+                  <a:alpha val="18000"/>
+                </a:srgbClr>
+              </a:outerShdw>
+            </a:effectLst>
+          </p:spPr>
+        </p:sp>
+        <p:sp>
+          <p:nvSpPr>
+            <p:cNvPr id="22" name="Shape 8">
+              <a:extLst>
+                <a:ext uri="{FF2B5EF4-FFF2-40B4-BE49-F238E27FC236}">
+                  <a16:creationId xmlns:a16="http://schemas.microsoft.com/office/drawing/2014/main" id="{B112E886-563F-4F39-A172-BE7EF286BF73}"/>
+                </a:ext>
+              </a:extLst>
+            </p:cNvPr>
+            <p:cNvSpPr/>
+            <p:nvPr/>
+          </p:nvSpPr>
+          <p:spPr>
+            <a:xfrm>
+              <a:off x="219762" y="233057"/>
+              <a:ext cx="660015" cy="658368"/>
+            </a:xfrm>
+            <a:prstGeom prst="roundRect">
+              <a:avLst>
+                <a:gd name="adj" fmla="val 9722"/>
+              </a:avLst>
+            </a:prstGeom>
+            <a:solidFill>
+              <a:schemeClr val="tx2">
+                <a:lumMod val="75000"/>
+              </a:schemeClr>
+            </a:solidFill>
+            <a:ln/>
+          </p:spPr>
+        </p:sp>
+        <p:sp>
+          <p:nvSpPr>
+            <p:cNvPr id="23" name="Text 9">
+              <a:extLst>
+                <a:ext uri="{FF2B5EF4-FFF2-40B4-BE49-F238E27FC236}">
+                  <a16:creationId xmlns:a16="http://schemas.microsoft.com/office/drawing/2014/main" id="{9BC1B9C4-C46A-4BE2-8625-820F633C17CA}"/>
+                </a:ext>
+              </a:extLst>
+            </p:cNvPr>
+            <p:cNvSpPr/>
+            <p:nvPr/>
+          </p:nvSpPr>
+          <p:spPr>
+            <a:xfrm>
+              <a:off x="219761" y="397649"/>
+              <a:ext cx="660015" cy="320040"/>
+            </a:xfrm>
+            <a:prstGeom prst="rect">
+              <a:avLst/>
+            </a:prstGeom>
+            <a:noFill/>
+            <a:ln/>
+          </p:spPr>
+          <p:txBody>
+            <a:bodyPr wrap="square" lIns="0" tIns="0" rIns="0" bIns="0" rtlCol="0" anchor="ctr"/>
+            <a:lstStyle/>
+            <a:p>
+              <a:pPr marL="0" indent="0" algn="ctr">
+                <a:buNone/>
+              </a:pPr>
+              <a:r>
+                <a:rPr lang="en-US" sz="1200" b="1" dirty="0">
+                  <a:solidFill>
+                    <a:srgbClr val="FFFFFF"/>
+                  </a:solidFill>
+                  <a:latin typeface="Calibri" pitchFamily="34" charset="0"/>
+                  <a:ea typeface="Calibri" pitchFamily="34" charset="-122"/>
+                  <a:cs typeface="Calibri" pitchFamily="34" charset="-120"/>
+                </a:rPr>
+                <a:t>B2</a:t>
+              </a:r>
+              <a:endParaRPr lang="en-US" sz="1200" dirty="0"/>
+            </a:p>
+          </p:txBody>
+        </p:sp>
+        <p:sp>
+          <p:nvSpPr>
+            <p:cNvPr id="24" name="Text 10">
+              <a:extLst>
+                <a:ext uri="{FF2B5EF4-FFF2-40B4-BE49-F238E27FC236}">
+                  <a16:creationId xmlns:a16="http://schemas.microsoft.com/office/drawing/2014/main" id="{686B51F8-9E1B-4785-A5A3-F7EC3DFEDA0A}"/>
+                </a:ext>
+              </a:extLst>
+            </p:cNvPr>
+            <p:cNvSpPr/>
+            <p:nvPr/>
+          </p:nvSpPr>
+          <p:spPr>
+            <a:xfrm>
+              <a:off x="1064962" y="420509"/>
+              <a:ext cx="6227186" cy="240318"/>
+            </a:xfrm>
+            <a:prstGeom prst="rect">
+              <a:avLst/>
+            </a:prstGeom>
+            <a:noFill/>
+            <a:ln/>
+          </p:spPr>
+          <p:txBody>
+            <a:bodyPr wrap="square" lIns="0" tIns="0" rIns="0" bIns="0" rtlCol="0" anchor="ctr"/>
+            <a:lstStyle/>
+            <a:p>
+              <a:pPr marL="0" indent="0">
+                <a:buNone/>
+              </a:pPr>
+              <a:r>
+                <a:rPr lang="en-IN" sz="1200" b="1" spc="300" dirty="0">
+                  <a:latin typeface="Archivo" panose="020B0604020202020204" charset="0"/>
+                  <a:ea typeface="Calibri" panose="020F0502020204030204" pitchFamily="34" charset="0"/>
+                  <a:cs typeface="Archivo" panose="020B0604020202020204" charset="0"/>
+                </a:rPr>
+                <a:t>AUTOMATED HTML EMAIL REPORT</a:t>
+              </a:r>
+              <a:endParaRPr lang="en-US" b="1" spc="300" dirty="0">
+                <a:latin typeface="Archivo" panose="020B0604020202020204" charset="0"/>
+                <a:ea typeface="Calibri" panose="020F0502020204030204" pitchFamily="34" charset="0"/>
+                <a:cs typeface="Archivo" panose="020B0604020202020204" charset="0"/>
+              </a:endParaRPr>
+            </a:p>
+          </p:txBody>
+        </p:sp>
+      </p:grpSp>
+      <p:pic>
+        <p:nvPicPr>
+          <p:cNvPr id="2" name="Picture 1">
+            <a:extLst>
+              <a:ext uri="{FF2B5EF4-FFF2-40B4-BE49-F238E27FC236}">
+                <a16:creationId xmlns:a16="http://schemas.microsoft.com/office/drawing/2014/main" id="{07D1455D-740F-43C7-8516-8FEB7221427F}"/>
+              </a:ext>
+            </a:extLst>
+          </p:cNvPr>
+          <p:cNvPicPr>
+            <a:picLocks noChangeAspect="1"/>
+          </p:cNvPicPr>
+          <p:nvPr/>
+        </p:nvPicPr>
+        <p:blipFill>
+          <a:blip r:embed="rId3"/>
+          <a:stretch>
+            <a:fillRect/>
+          </a:stretch>
+        </p:blipFill>
+        <p:spPr>
+          <a:xfrm>
+            <a:off x="380725" y="851353"/>
+            <a:ext cx="3807073" cy="4212826"/>
+          </a:xfrm>
+          <a:prstGeom prst="rect">
+            <a:avLst/>
+          </a:prstGeom>
+        </p:spPr>
+      </p:pic>
+      <p:pic>
+        <p:nvPicPr>
+          <p:cNvPr id="4" name="Picture 3">
+            <a:extLst>
+              <a:ext uri="{FF2B5EF4-FFF2-40B4-BE49-F238E27FC236}">
+                <a16:creationId xmlns:a16="http://schemas.microsoft.com/office/drawing/2014/main" id="{A6F97308-A824-4E90-BEE0-ED659C6C32B3}"/>
+              </a:ext>
+            </a:extLst>
+          </p:cNvPr>
+          <p:cNvPicPr>
+            <a:picLocks noChangeAspect="1"/>
+          </p:cNvPicPr>
+          <p:nvPr/>
+        </p:nvPicPr>
+        <p:blipFill>
+          <a:blip r:embed="rId4"/>
+          <a:stretch>
+            <a:fillRect/>
+          </a:stretch>
+        </p:blipFill>
+        <p:spPr>
+          <a:xfrm>
+            <a:off x="5263836" y="918788"/>
+            <a:ext cx="3176197" cy="4077956"/>
+          </a:xfrm>
+          <a:prstGeom prst="rect">
+            <a:avLst/>
+          </a:prstGeom>
+        </p:spPr>
+      </p:pic>
+    </p:spTree>
+    <p:extLst>
+      <p:ext uri="{BB962C8B-B14F-4D97-AF65-F5344CB8AC3E}">
+        <p14:creationId xmlns:p14="http://schemas.microsoft.com/office/powerpoint/2010/main" val="358793897"/>
+      </p:ext>
+    </p:extLst>
+  </p:cSld>
+  <p:clrMapOvr>
+    <a:masterClrMapping/>
+  </p:clrMapOvr>
+</p:sld>
+</file>
+
+<file path=ppt/slides/slide2.xml><?xml version="1.0" encoding="utf-8"?>
+<p:sld xmlns:a="http://schemas.openxmlformats.org/drawingml/2006/main" xmlns:r="http://schemas.openxmlformats.org/officeDocument/2006/relationships" xmlns:p="http://schemas.openxmlformats.org/presentationml/2006/main">
+  <p:cSld>
+    <p:spTree>
+      <p:nvGrpSpPr>
+        <p:cNvPr id="1" name="Shape 148"/>
+        <p:cNvGrpSpPr/>
+        <p:nvPr/>
+      </p:nvGrpSpPr>
+      <p:grpSpPr>
+        <a:xfrm>
+          <a:off x="0" y="0"/>
+          <a:ext cx="0" cy="0"/>
+          <a:chOff x="0" y="0"/>
+          <a:chExt cx="0" cy="0"/>
+        </a:xfrm>
+      </p:grpSpPr>
+      <p:sp>
+        <p:nvSpPr>
+          <p:cNvPr id="149" name="Google Shape;149;p29"/>
+          <p:cNvSpPr txBox="1">
+            <a:spLocks noGrp="1"/>
+          </p:cNvSpPr>
+          <p:nvPr>
+            <p:ph type="title"/>
+          </p:nvPr>
+        </p:nvSpPr>
+        <p:spPr>
+          <a:xfrm>
+            <a:off x="720000" y="164241"/>
+            <a:ext cx="7704000" cy="702000"/>
+          </a:xfrm>
+          <a:prstGeom prst="rect">
+            <a:avLst/>
+          </a:prstGeom>
+        </p:spPr>
+        <p:txBody>
+          <a:bodyPr spcFirstLastPara="1" wrap="square" lIns="91425" tIns="91425" rIns="91425" bIns="91425" anchor="ctr" anchorCtr="0">
+            <a:noAutofit/>
+          </a:bodyPr>
+          <a:lstStyle/>
+          <a:p>
+            <a:pPr marL="0" lvl="0" indent="0" algn="l" rtl="0">
+              <a:spcBef>
+                <a:spcPts val="0"/>
+              </a:spcBef>
+              <a:spcAft>
+                <a:spcPts val="0"/>
+              </a:spcAft>
+              <a:buNone/>
+            </a:pPr>
+            <a:r>
+              <a:rPr lang="en-IN" dirty="0"/>
+              <a:t>PROBLEM STATEMENT AND OBJECTIVE</a:t>
+            </a:r>
+            <a:endParaRPr dirty="0"/>
+          </a:p>
+        </p:txBody>
+      </p:sp>
+      <p:sp>
+        <p:nvSpPr>
+          <p:cNvPr id="63" name="Shape 2">
+            <a:extLst>
+              <a:ext uri="{FF2B5EF4-FFF2-40B4-BE49-F238E27FC236}">
+                <a16:creationId xmlns:a16="http://schemas.microsoft.com/office/drawing/2014/main" id="{D3BFD681-0649-45DE-9E95-A65B77CC7B9F}"/>
+              </a:ext>
+            </a:extLst>
+          </p:cNvPr>
+          <p:cNvSpPr/>
+          <p:nvPr/>
+        </p:nvSpPr>
+        <p:spPr>
+          <a:xfrm>
+            <a:off x="365760" y="1143000"/>
+            <a:ext cx="8412480" cy="685801"/>
+          </a:xfrm>
+          <a:prstGeom prst="roundRect">
+            <a:avLst>
+              <a:gd name="adj" fmla="val 9333"/>
+            </a:avLst>
+          </a:prstGeom>
+          <a:solidFill>
+            <a:srgbClr val="FFFFFF"/>
+          </a:solidFill>
+          <a:ln/>
+          <a:effectLst>
+            <a:outerShdw blurRad="101600" dist="38100" dir="2700000" algn="bl" rotWithShape="0">
+              <a:srgbClr val="000000">
+                <a:alpha val="18000"/>
+              </a:srgbClr>
+            </a:outerShdw>
+          </a:effectLst>
+        </p:spPr>
+      </p:sp>
+      <p:sp>
+        <p:nvSpPr>
+          <p:cNvPr id="64" name="Shape 3">
+            <a:extLst>
+              <a:ext uri="{FF2B5EF4-FFF2-40B4-BE49-F238E27FC236}">
+                <a16:creationId xmlns:a16="http://schemas.microsoft.com/office/drawing/2014/main" id="{32DB3D78-2FE7-4FB6-B20A-10D9D47B6737}"/>
+              </a:ext>
+            </a:extLst>
+          </p:cNvPr>
+          <p:cNvSpPr/>
+          <p:nvPr/>
+        </p:nvSpPr>
+        <p:spPr>
+          <a:xfrm>
+            <a:off x="365760" y="1143000"/>
+            <a:ext cx="502920" cy="685801"/>
+          </a:xfrm>
+          <a:prstGeom prst="roundRect">
+            <a:avLst>
+              <a:gd name="adj" fmla="val 12727"/>
+            </a:avLst>
+          </a:prstGeom>
+          <a:solidFill>
+            <a:schemeClr val="tx2">
+              <a:lumMod val="75000"/>
+            </a:schemeClr>
+          </a:solidFill>
+          <a:ln/>
+        </p:spPr>
+      </p:sp>
+      <p:sp>
+        <p:nvSpPr>
+          <p:cNvPr id="65" name="Text 4">
+            <a:extLst>
+              <a:ext uri="{FF2B5EF4-FFF2-40B4-BE49-F238E27FC236}">
+                <a16:creationId xmlns:a16="http://schemas.microsoft.com/office/drawing/2014/main" id="{C173DC22-454F-4E46-95A3-BD7C7A3306FE}"/>
+              </a:ext>
+            </a:extLst>
+          </p:cNvPr>
+          <p:cNvSpPr/>
+          <p:nvPr/>
+        </p:nvSpPr>
+        <p:spPr>
+          <a:xfrm>
+            <a:off x="365760" y="1307592"/>
+            <a:ext cx="502920" cy="347472"/>
+          </a:xfrm>
+          <a:prstGeom prst="rect">
+            <a:avLst/>
+          </a:prstGeom>
+          <a:noFill/>
+          <a:ln/>
+        </p:spPr>
+        <p:txBody>
+          <a:bodyPr wrap="square" lIns="0" tIns="0" rIns="0" bIns="0" rtlCol="0" anchor="ctr"/>
+          <a:lstStyle/>
+          <a:p>
+            <a:pPr marL="0" indent="0" algn="ctr">
+              <a:buNone/>
+            </a:pPr>
+            <a:r>
+              <a:rPr lang="en-US" sz="1000" b="1" dirty="0">
+                <a:solidFill>
+                  <a:srgbClr val="FFFFFF"/>
+                </a:solidFill>
+                <a:latin typeface="Calibri" pitchFamily="34" charset="0"/>
+                <a:ea typeface="Calibri" pitchFamily="34" charset="-122"/>
+                <a:cs typeface="Calibri" pitchFamily="34" charset="-120"/>
+              </a:rPr>
+              <a:t>P1</a:t>
+            </a:r>
+            <a:endParaRPr lang="en-US" sz="1000" dirty="0"/>
+          </a:p>
+        </p:txBody>
+      </p:sp>
+      <p:sp>
+        <p:nvSpPr>
+          <p:cNvPr id="66" name="Text 5">
+            <a:extLst>
+              <a:ext uri="{FF2B5EF4-FFF2-40B4-BE49-F238E27FC236}">
+                <a16:creationId xmlns:a16="http://schemas.microsoft.com/office/drawing/2014/main" id="{008CFF3D-4BD1-4DCF-A0D0-1BE1753AA642}"/>
+              </a:ext>
+            </a:extLst>
+          </p:cNvPr>
+          <p:cNvSpPr/>
+          <p:nvPr/>
+        </p:nvSpPr>
+        <p:spPr>
+          <a:xfrm>
+            <a:off x="987552" y="1197864"/>
+            <a:ext cx="2286000" cy="274320"/>
+          </a:xfrm>
+          <a:prstGeom prst="rect">
+            <a:avLst/>
+          </a:prstGeom>
+          <a:noFill/>
+          <a:ln/>
+        </p:spPr>
+        <p:txBody>
+          <a:bodyPr wrap="square" lIns="0" tIns="0" rIns="0" bIns="0" rtlCol="0" anchor="ctr"/>
+          <a:lstStyle/>
+          <a:p>
+            <a:pPr marL="0" indent="0">
+              <a:buNone/>
+            </a:pPr>
+            <a:r>
+              <a:rPr lang="en-US" sz="1200" b="1" dirty="0">
+                <a:solidFill>
+                  <a:srgbClr val="0F1923"/>
+                </a:solidFill>
+                <a:latin typeface="Archivo" panose="020B0604020202020204" charset="0"/>
+                <a:ea typeface="Calibri" pitchFamily="34" charset="-122"/>
+                <a:cs typeface="Archivo" panose="020B0604020202020204" charset="0"/>
+              </a:rPr>
+              <a:t>Data Fragmentation</a:t>
+            </a:r>
+            <a:endParaRPr lang="en-US" sz="1200" dirty="0">
+              <a:latin typeface="Archivo" panose="020B0604020202020204" charset="0"/>
+              <a:cs typeface="Archivo" panose="020B0604020202020204" charset="0"/>
+            </a:endParaRPr>
+          </a:p>
+        </p:txBody>
+      </p:sp>
+      <p:sp>
+        <p:nvSpPr>
+          <p:cNvPr id="67" name="Text 6">
+            <a:extLst>
+              <a:ext uri="{FF2B5EF4-FFF2-40B4-BE49-F238E27FC236}">
+                <a16:creationId xmlns:a16="http://schemas.microsoft.com/office/drawing/2014/main" id="{5A5BDBAF-9DE2-4210-9FAD-8C6ACE50A06C}"/>
+              </a:ext>
+            </a:extLst>
+          </p:cNvPr>
+          <p:cNvSpPr/>
+          <p:nvPr/>
+        </p:nvSpPr>
+        <p:spPr>
+          <a:xfrm>
+            <a:off x="987552" y="1490472"/>
+            <a:ext cx="7589520" cy="256032"/>
+          </a:xfrm>
+          <a:prstGeom prst="rect">
+            <a:avLst/>
+          </a:prstGeom>
+          <a:noFill/>
+          <a:ln/>
+        </p:spPr>
+        <p:txBody>
+          <a:bodyPr wrap="square" lIns="0" tIns="0" rIns="0" bIns="0" rtlCol="0" anchor="ctr"/>
+          <a:lstStyle/>
+          <a:p>
+            <a:pPr marL="0" indent="0">
+              <a:buNone/>
+            </a:pPr>
+            <a:r>
+              <a:rPr lang="en-US" sz="1050" dirty="0">
+                <a:solidFill>
+                  <a:srgbClr val="555555"/>
+                </a:solidFill>
+                <a:latin typeface="Archivo" panose="020B0604020202020204" charset="0"/>
+                <a:ea typeface="Calibri" pitchFamily="34" charset="-122"/>
+                <a:cs typeface="Archivo" panose="020B0604020202020204" charset="0"/>
+              </a:rPr>
+              <a:t>NAV, AUM, SIP and holdings data scattered across different AMFI formats</a:t>
+            </a:r>
+            <a:endParaRPr lang="en-US" sz="1050" dirty="0">
+              <a:latin typeface="Archivo" panose="020B0604020202020204" charset="0"/>
+              <a:cs typeface="Archivo" panose="020B0604020202020204" charset="0"/>
+            </a:endParaRPr>
+          </a:p>
+        </p:txBody>
+      </p:sp>
+      <p:sp>
+        <p:nvSpPr>
+          <p:cNvPr id="68" name="Shape 7">
+            <a:extLst>
+              <a:ext uri="{FF2B5EF4-FFF2-40B4-BE49-F238E27FC236}">
+                <a16:creationId xmlns:a16="http://schemas.microsoft.com/office/drawing/2014/main" id="{7AF80FF0-43B7-41C6-AAE6-75C502BCFE57}"/>
+              </a:ext>
+            </a:extLst>
+          </p:cNvPr>
+          <p:cNvSpPr/>
+          <p:nvPr/>
+        </p:nvSpPr>
+        <p:spPr>
+          <a:xfrm>
+            <a:off x="365760" y="1911096"/>
+            <a:ext cx="8412480" cy="685801"/>
+          </a:xfrm>
+          <a:prstGeom prst="roundRect">
+            <a:avLst>
+              <a:gd name="adj" fmla="val 9333"/>
+            </a:avLst>
+          </a:prstGeom>
+          <a:solidFill>
+            <a:srgbClr val="FFFFFF"/>
+          </a:solidFill>
+          <a:ln/>
+          <a:effectLst>
+            <a:outerShdw blurRad="101600" dist="38100" dir="2700000" algn="bl" rotWithShape="0">
+              <a:srgbClr val="000000">
+                <a:alpha val="18000"/>
+              </a:srgbClr>
+            </a:outerShdw>
+          </a:effectLst>
+        </p:spPr>
+      </p:sp>
+      <p:sp>
+        <p:nvSpPr>
+          <p:cNvPr id="69" name="Shape 8">
+            <a:extLst>
+              <a:ext uri="{FF2B5EF4-FFF2-40B4-BE49-F238E27FC236}">
+                <a16:creationId xmlns:a16="http://schemas.microsoft.com/office/drawing/2014/main" id="{8F1CB52D-E8E3-47A5-A195-0D2442D92E85}"/>
+              </a:ext>
+            </a:extLst>
+          </p:cNvPr>
+          <p:cNvSpPr/>
+          <p:nvPr/>
+        </p:nvSpPr>
+        <p:spPr>
+          <a:xfrm>
+            <a:off x="365760" y="1911096"/>
+            <a:ext cx="502920" cy="685801"/>
+          </a:xfrm>
+          <a:prstGeom prst="roundRect">
+            <a:avLst>
+              <a:gd name="adj" fmla="val 12727"/>
+            </a:avLst>
+          </a:prstGeom>
+          <a:solidFill>
+            <a:schemeClr val="tx2">
+              <a:lumMod val="75000"/>
+            </a:schemeClr>
+          </a:solidFill>
+          <a:ln/>
+        </p:spPr>
+      </p:sp>
+      <p:sp>
+        <p:nvSpPr>
+          <p:cNvPr id="70" name="Text 9">
+            <a:extLst>
+              <a:ext uri="{FF2B5EF4-FFF2-40B4-BE49-F238E27FC236}">
+                <a16:creationId xmlns:a16="http://schemas.microsoft.com/office/drawing/2014/main" id="{85E2EDC0-9456-4B9A-AC95-6EB8687AB982}"/>
+              </a:ext>
+            </a:extLst>
+          </p:cNvPr>
+          <p:cNvSpPr/>
+          <p:nvPr/>
+        </p:nvSpPr>
+        <p:spPr>
+          <a:xfrm>
+            <a:off x="365760" y="2075688"/>
+            <a:ext cx="502920" cy="347472"/>
+          </a:xfrm>
+          <a:prstGeom prst="rect">
+            <a:avLst/>
+          </a:prstGeom>
+          <a:noFill/>
+          <a:ln/>
+        </p:spPr>
+        <p:txBody>
+          <a:bodyPr wrap="square" lIns="0" tIns="0" rIns="0" bIns="0" rtlCol="0" anchor="ctr"/>
+          <a:lstStyle/>
+          <a:p>
+            <a:pPr marL="0" indent="0" algn="ctr">
+              <a:buNone/>
+            </a:pPr>
+            <a:r>
+              <a:rPr lang="en-US" sz="1000" b="1" dirty="0">
+                <a:solidFill>
+                  <a:srgbClr val="FFFFFF"/>
+                </a:solidFill>
+                <a:latin typeface="Calibri" pitchFamily="34" charset="0"/>
+                <a:ea typeface="Calibri" pitchFamily="34" charset="-122"/>
+                <a:cs typeface="Calibri" pitchFamily="34" charset="-120"/>
+              </a:rPr>
+              <a:t>P2</a:t>
+            </a:r>
+            <a:endParaRPr lang="en-US" sz="1000" dirty="0"/>
+          </a:p>
+        </p:txBody>
+      </p:sp>
+      <p:sp>
+        <p:nvSpPr>
+          <p:cNvPr id="71" name="Text 10">
+            <a:extLst>
+              <a:ext uri="{FF2B5EF4-FFF2-40B4-BE49-F238E27FC236}">
+                <a16:creationId xmlns:a16="http://schemas.microsoft.com/office/drawing/2014/main" id="{C5B7F415-A1AB-4D1C-81D5-7ED8FCF23B34}"/>
+              </a:ext>
+            </a:extLst>
+          </p:cNvPr>
+          <p:cNvSpPr/>
+          <p:nvPr/>
+        </p:nvSpPr>
+        <p:spPr>
+          <a:xfrm>
+            <a:off x="987552" y="1965960"/>
+            <a:ext cx="2286000" cy="274320"/>
+          </a:xfrm>
+          <a:prstGeom prst="rect">
+            <a:avLst/>
+          </a:prstGeom>
+          <a:noFill/>
+          <a:ln/>
+        </p:spPr>
+        <p:txBody>
+          <a:bodyPr wrap="square" lIns="0" tIns="0" rIns="0" bIns="0" rtlCol="0" anchor="ctr"/>
+          <a:lstStyle/>
+          <a:p>
+            <a:pPr marL="0" indent="0">
+              <a:buNone/>
+            </a:pPr>
+            <a:r>
+              <a:rPr lang="en-US" sz="1200" b="1" dirty="0">
+                <a:solidFill>
+                  <a:srgbClr val="0F1923"/>
+                </a:solidFill>
+                <a:latin typeface="Archivo" panose="020B0604020202020204" charset="0"/>
+                <a:ea typeface="Calibri" pitchFamily="34" charset="-122"/>
+                <a:cs typeface="Archivo" panose="020B0604020202020204" charset="0"/>
+              </a:rPr>
+              <a:t>Performance Gap</a:t>
+            </a:r>
+            <a:endParaRPr lang="en-US" sz="1200" dirty="0">
+              <a:latin typeface="Archivo" panose="020B0604020202020204" charset="0"/>
+              <a:cs typeface="Archivo" panose="020B0604020202020204" charset="0"/>
+            </a:endParaRPr>
+          </a:p>
+        </p:txBody>
+      </p:sp>
+      <p:sp>
+        <p:nvSpPr>
+          <p:cNvPr id="72" name="Text 11">
+            <a:extLst>
+              <a:ext uri="{FF2B5EF4-FFF2-40B4-BE49-F238E27FC236}">
+                <a16:creationId xmlns:a16="http://schemas.microsoft.com/office/drawing/2014/main" id="{EFC11ACA-67CA-41BA-B926-E3B9178323A8}"/>
+              </a:ext>
+            </a:extLst>
+          </p:cNvPr>
+          <p:cNvSpPr/>
+          <p:nvPr/>
+        </p:nvSpPr>
+        <p:spPr>
+          <a:xfrm>
+            <a:off x="987552" y="2258568"/>
+            <a:ext cx="7589520" cy="256032"/>
+          </a:xfrm>
+          <a:prstGeom prst="rect">
+            <a:avLst/>
+          </a:prstGeom>
+          <a:noFill/>
+          <a:ln/>
+        </p:spPr>
+        <p:txBody>
+          <a:bodyPr wrap="square" lIns="0" tIns="0" rIns="0" bIns="0" rtlCol="0" anchor="ctr"/>
+          <a:lstStyle/>
+          <a:p>
+            <a:pPr marL="0" indent="0">
+              <a:buNone/>
+            </a:pPr>
+            <a:r>
+              <a:rPr lang="en-US" sz="1050" dirty="0">
+                <a:solidFill>
+                  <a:srgbClr val="555555"/>
+                </a:solidFill>
+                <a:latin typeface="Archivo" panose="020B0604020202020204" charset="0"/>
+                <a:ea typeface="Calibri" pitchFamily="34" charset="-122"/>
+                <a:cs typeface="Archivo" panose="020B0604020202020204" charset="0"/>
+              </a:rPr>
+              <a:t>No unified platform to compare funds on risk-adjusted metrics</a:t>
+            </a:r>
+            <a:endParaRPr lang="en-US" sz="1050" dirty="0">
+              <a:latin typeface="Archivo" panose="020B0604020202020204" charset="0"/>
+              <a:cs typeface="Archivo" panose="020B0604020202020204" charset="0"/>
+            </a:endParaRPr>
+          </a:p>
+        </p:txBody>
+      </p:sp>
+      <p:sp>
+        <p:nvSpPr>
+          <p:cNvPr id="73" name="Shape 12">
+            <a:extLst>
+              <a:ext uri="{FF2B5EF4-FFF2-40B4-BE49-F238E27FC236}">
+                <a16:creationId xmlns:a16="http://schemas.microsoft.com/office/drawing/2014/main" id="{5567E71C-AA57-49AF-A19D-B19D89850AFB}"/>
+              </a:ext>
+            </a:extLst>
+          </p:cNvPr>
+          <p:cNvSpPr/>
+          <p:nvPr/>
+        </p:nvSpPr>
+        <p:spPr>
+          <a:xfrm>
+            <a:off x="365760" y="2679192"/>
+            <a:ext cx="8412480" cy="685801"/>
+          </a:xfrm>
+          <a:prstGeom prst="roundRect">
+            <a:avLst>
+              <a:gd name="adj" fmla="val 9333"/>
+            </a:avLst>
+          </a:prstGeom>
+          <a:solidFill>
+            <a:srgbClr val="FFFFFF"/>
+          </a:solidFill>
+          <a:ln/>
+          <a:effectLst>
+            <a:outerShdw blurRad="101600" dist="38100" dir="2700000" algn="bl" rotWithShape="0">
+              <a:srgbClr val="000000">
+                <a:alpha val="18000"/>
+              </a:srgbClr>
+            </a:outerShdw>
+          </a:effectLst>
+        </p:spPr>
+      </p:sp>
+      <p:sp>
+        <p:nvSpPr>
+          <p:cNvPr id="74" name="Shape 13">
+            <a:extLst>
+              <a:ext uri="{FF2B5EF4-FFF2-40B4-BE49-F238E27FC236}">
+                <a16:creationId xmlns:a16="http://schemas.microsoft.com/office/drawing/2014/main" id="{FEFAFA93-EC06-43C3-8E6A-0625DDA9B24D}"/>
+              </a:ext>
+            </a:extLst>
+          </p:cNvPr>
+          <p:cNvSpPr/>
+          <p:nvPr/>
+        </p:nvSpPr>
+        <p:spPr>
+          <a:xfrm>
+            <a:off x="365760" y="2679192"/>
+            <a:ext cx="502920" cy="685801"/>
+          </a:xfrm>
+          <a:prstGeom prst="roundRect">
+            <a:avLst>
+              <a:gd name="adj" fmla="val 12727"/>
+            </a:avLst>
+          </a:prstGeom>
+          <a:solidFill>
+            <a:schemeClr val="tx2">
+              <a:lumMod val="75000"/>
+            </a:schemeClr>
+          </a:solidFill>
+          <a:ln/>
+        </p:spPr>
+      </p:sp>
+      <p:sp>
+        <p:nvSpPr>
+          <p:cNvPr id="75" name="Text 14">
+            <a:extLst>
+              <a:ext uri="{FF2B5EF4-FFF2-40B4-BE49-F238E27FC236}">
+                <a16:creationId xmlns:a16="http://schemas.microsoft.com/office/drawing/2014/main" id="{7B5824BD-6AFD-4374-9892-A6E0A01B495F}"/>
+              </a:ext>
+            </a:extLst>
+          </p:cNvPr>
+          <p:cNvSpPr/>
+          <p:nvPr/>
+        </p:nvSpPr>
+        <p:spPr>
+          <a:xfrm>
+            <a:off x="365760" y="2843784"/>
+            <a:ext cx="502920" cy="347472"/>
+          </a:xfrm>
+          <a:prstGeom prst="rect">
+            <a:avLst/>
+          </a:prstGeom>
+          <a:noFill/>
+          <a:ln/>
+        </p:spPr>
+        <p:txBody>
+          <a:bodyPr wrap="square" lIns="0" tIns="0" rIns="0" bIns="0" rtlCol="0" anchor="ctr"/>
+          <a:lstStyle/>
+          <a:p>
+            <a:pPr marL="0" indent="0" algn="ctr">
+              <a:buNone/>
+            </a:pPr>
+            <a:r>
+              <a:rPr lang="en-US" sz="1000" b="1" dirty="0">
+                <a:solidFill>
+                  <a:srgbClr val="FFFFFF"/>
+                </a:solidFill>
+                <a:latin typeface="Calibri" pitchFamily="34" charset="0"/>
+                <a:ea typeface="Calibri" pitchFamily="34" charset="-122"/>
+                <a:cs typeface="Calibri" pitchFamily="34" charset="-120"/>
+              </a:rPr>
+              <a:t>P3</a:t>
+            </a:r>
+            <a:endParaRPr lang="en-US" sz="1000" dirty="0"/>
+          </a:p>
+        </p:txBody>
+      </p:sp>
+      <p:sp>
+        <p:nvSpPr>
+          <p:cNvPr id="76" name="Text 15">
+            <a:extLst>
+              <a:ext uri="{FF2B5EF4-FFF2-40B4-BE49-F238E27FC236}">
+                <a16:creationId xmlns:a16="http://schemas.microsoft.com/office/drawing/2014/main" id="{801F5DD4-6AB5-474E-B137-A5EA80530D1D}"/>
+              </a:ext>
+            </a:extLst>
+          </p:cNvPr>
+          <p:cNvSpPr/>
+          <p:nvPr/>
+        </p:nvSpPr>
+        <p:spPr>
+          <a:xfrm>
+            <a:off x="987552" y="2734056"/>
+            <a:ext cx="2286000" cy="274320"/>
+          </a:xfrm>
+          <a:prstGeom prst="rect">
+            <a:avLst/>
+          </a:prstGeom>
+          <a:noFill/>
+          <a:ln/>
+        </p:spPr>
+        <p:txBody>
+          <a:bodyPr wrap="square" lIns="0" tIns="0" rIns="0" bIns="0" rtlCol="0" anchor="ctr"/>
+          <a:lstStyle/>
+          <a:p>
+            <a:pPr marL="0" indent="0">
+              <a:buNone/>
+            </a:pPr>
+            <a:r>
+              <a:rPr lang="en-US" sz="1200" b="1" dirty="0">
+                <a:solidFill>
+                  <a:srgbClr val="0F1923"/>
+                </a:solidFill>
+                <a:latin typeface="Archivo" panose="020B0604020202020204" charset="0"/>
+                <a:ea typeface="Calibri" pitchFamily="34" charset="-122"/>
+                <a:cs typeface="Archivo" panose="020B0604020202020204" charset="0"/>
+              </a:rPr>
+              <a:t>No Benchmark Tracking</a:t>
+            </a:r>
+            <a:endParaRPr lang="en-US" sz="1200" dirty="0">
+              <a:latin typeface="Archivo" panose="020B0604020202020204" charset="0"/>
+              <a:cs typeface="Archivo" panose="020B0604020202020204" charset="0"/>
+            </a:endParaRPr>
+          </a:p>
+        </p:txBody>
+      </p:sp>
+      <p:sp>
+        <p:nvSpPr>
+          <p:cNvPr id="77" name="Text 16">
+            <a:extLst>
+              <a:ext uri="{FF2B5EF4-FFF2-40B4-BE49-F238E27FC236}">
+                <a16:creationId xmlns:a16="http://schemas.microsoft.com/office/drawing/2014/main" id="{BBF17EDA-15F7-4A51-8E17-9E05800BA749}"/>
+              </a:ext>
+            </a:extLst>
+          </p:cNvPr>
+          <p:cNvSpPr/>
+          <p:nvPr/>
+        </p:nvSpPr>
+        <p:spPr>
+          <a:xfrm>
+            <a:off x="987552" y="3026664"/>
+            <a:ext cx="7589520" cy="256032"/>
+          </a:xfrm>
+          <a:prstGeom prst="rect">
+            <a:avLst/>
+          </a:prstGeom>
+          <a:noFill/>
+          <a:ln/>
+        </p:spPr>
+        <p:txBody>
+          <a:bodyPr wrap="square" lIns="0" tIns="0" rIns="0" bIns="0" rtlCol="0" anchor="ctr"/>
+          <a:lstStyle/>
+          <a:p>
+            <a:pPr marL="0" indent="0">
+              <a:buNone/>
+            </a:pPr>
+            <a:r>
+              <a:rPr lang="en-US" sz="1050" dirty="0">
+                <a:solidFill>
+                  <a:srgbClr val="555555"/>
+                </a:solidFill>
+                <a:latin typeface="Archivo" panose="020B0604020202020204" charset="0"/>
+                <a:ea typeface="Calibri" pitchFamily="34" charset="-122"/>
+                <a:cs typeface="Archivo" panose="020B0604020202020204" charset="0"/>
+              </a:rPr>
+              <a:t>Investors cannot see if their fund beats Nifty 50 / Nifty 100</a:t>
+            </a:r>
+            <a:endParaRPr lang="en-US" sz="1050" dirty="0">
+              <a:latin typeface="Archivo" panose="020B0604020202020204" charset="0"/>
+              <a:cs typeface="Archivo" panose="020B0604020202020204" charset="0"/>
+            </a:endParaRPr>
+          </a:p>
+        </p:txBody>
+      </p:sp>
+      <p:sp>
+        <p:nvSpPr>
+          <p:cNvPr id="78" name="Shape 17">
+            <a:extLst>
+              <a:ext uri="{FF2B5EF4-FFF2-40B4-BE49-F238E27FC236}">
+                <a16:creationId xmlns:a16="http://schemas.microsoft.com/office/drawing/2014/main" id="{C11EFAF5-550D-4CC9-9BC3-E8A4DADC621B}"/>
+              </a:ext>
+            </a:extLst>
+          </p:cNvPr>
+          <p:cNvSpPr/>
+          <p:nvPr/>
+        </p:nvSpPr>
+        <p:spPr>
+          <a:xfrm>
+            <a:off x="365760" y="3447288"/>
+            <a:ext cx="8412480" cy="685801"/>
+          </a:xfrm>
+          <a:prstGeom prst="roundRect">
+            <a:avLst>
+              <a:gd name="adj" fmla="val 9333"/>
+            </a:avLst>
+          </a:prstGeom>
+          <a:solidFill>
+            <a:srgbClr val="FFFFFF"/>
+          </a:solidFill>
+          <a:ln/>
+          <a:effectLst>
+            <a:outerShdw blurRad="101600" dist="38100" dir="2700000" algn="bl" rotWithShape="0">
+              <a:srgbClr val="000000">
+                <a:alpha val="18000"/>
+              </a:srgbClr>
+            </a:outerShdw>
+          </a:effectLst>
+        </p:spPr>
+      </p:sp>
+      <p:sp>
+        <p:nvSpPr>
+          <p:cNvPr id="79" name="Shape 18">
+            <a:extLst>
+              <a:ext uri="{FF2B5EF4-FFF2-40B4-BE49-F238E27FC236}">
+                <a16:creationId xmlns:a16="http://schemas.microsoft.com/office/drawing/2014/main" id="{ED4EA6BD-56A8-4FC3-8867-C1759AB56117}"/>
+              </a:ext>
+            </a:extLst>
+          </p:cNvPr>
+          <p:cNvSpPr/>
+          <p:nvPr/>
+        </p:nvSpPr>
+        <p:spPr>
+          <a:xfrm>
+            <a:off x="365760" y="3447288"/>
+            <a:ext cx="502920" cy="685801"/>
+          </a:xfrm>
+          <a:prstGeom prst="roundRect">
+            <a:avLst>
+              <a:gd name="adj" fmla="val 12727"/>
+            </a:avLst>
+          </a:prstGeom>
+          <a:solidFill>
+            <a:schemeClr val="tx2">
+              <a:lumMod val="75000"/>
+            </a:schemeClr>
+          </a:solidFill>
+          <a:ln/>
+        </p:spPr>
+      </p:sp>
+      <p:sp>
+        <p:nvSpPr>
+          <p:cNvPr id="80" name="Text 19">
+            <a:extLst>
+              <a:ext uri="{FF2B5EF4-FFF2-40B4-BE49-F238E27FC236}">
+                <a16:creationId xmlns:a16="http://schemas.microsoft.com/office/drawing/2014/main" id="{98AE421B-CD5A-4C46-A233-2948BF0A8B87}"/>
+              </a:ext>
+            </a:extLst>
+          </p:cNvPr>
+          <p:cNvSpPr/>
+          <p:nvPr/>
+        </p:nvSpPr>
+        <p:spPr>
+          <a:xfrm>
+            <a:off x="365760" y="3611880"/>
+            <a:ext cx="502920" cy="347472"/>
+          </a:xfrm>
+          <a:prstGeom prst="rect">
+            <a:avLst/>
+          </a:prstGeom>
+          <a:noFill/>
+          <a:ln/>
+        </p:spPr>
+        <p:txBody>
+          <a:bodyPr wrap="square" lIns="0" tIns="0" rIns="0" bIns="0" rtlCol="0" anchor="ctr"/>
+          <a:lstStyle/>
+          <a:p>
+            <a:pPr marL="0" indent="0" algn="ctr">
+              <a:buNone/>
+            </a:pPr>
+            <a:r>
+              <a:rPr lang="en-US" sz="1000" b="1" dirty="0">
+                <a:solidFill>
+                  <a:srgbClr val="FFFFFF"/>
+                </a:solidFill>
+                <a:latin typeface="Calibri" pitchFamily="34" charset="0"/>
+                <a:ea typeface="Calibri" pitchFamily="34" charset="-122"/>
+                <a:cs typeface="Calibri" pitchFamily="34" charset="-120"/>
+              </a:rPr>
+              <a:t>P4</a:t>
+            </a:r>
+            <a:endParaRPr lang="en-US" sz="1000" dirty="0"/>
+          </a:p>
+        </p:txBody>
+      </p:sp>
+      <p:sp>
+        <p:nvSpPr>
+          <p:cNvPr id="81" name="Text 20">
+            <a:extLst>
+              <a:ext uri="{FF2B5EF4-FFF2-40B4-BE49-F238E27FC236}">
+                <a16:creationId xmlns:a16="http://schemas.microsoft.com/office/drawing/2014/main" id="{082E2D20-F636-4676-B5A8-26C2BC7C6A88}"/>
+              </a:ext>
+            </a:extLst>
+          </p:cNvPr>
+          <p:cNvSpPr/>
+          <p:nvPr/>
+        </p:nvSpPr>
+        <p:spPr>
+          <a:xfrm>
+            <a:off x="987552" y="3502152"/>
+            <a:ext cx="2286000" cy="274320"/>
+          </a:xfrm>
+          <a:prstGeom prst="rect">
+            <a:avLst/>
+          </a:prstGeom>
+          <a:noFill/>
+          <a:ln/>
+        </p:spPr>
+        <p:txBody>
+          <a:bodyPr wrap="square" lIns="0" tIns="0" rIns="0" bIns="0" rtlCol="0" anchor="ctr"/>
+          <a:lstStyle/>
+          <a:p>
+            <a:pPr marL="0" indent="0">
+              <a:buNone/>
+            </a:pPr>
+            <a:r>
+              <a:rPr lang="en-US" sz="1200" b="1" dirty="0">
+                <a:solidFill>
+                  <a:srgbClr val="0F1923"/>
+                </a:solidFill>
+                <a:latin typeface="Archivo" panose="020B0604020202020204" charset="0"/>
+                <a:ea typeface="Calibri" pitchFamily="34" charset="-122"/>
+                <a:cs typeface="Archivo" panose="020B0604020202020204" charset="0"/>
+              </a:rPr>
+              <a:t>Investor Blind Spot</a:t>
+            </a:r>
+            <a:endParaRPr lang="en-US" sz="1200" dirty="0">
+              <a:latin typeface="Archivo" panose="020B0604020202020204" charset="0"/>
+              <a:cs typeface="Archivo" panose="020B0604020202020204" charset="0"/>
+            </a:endParaRPr>
+          </a:p>
+        </p:txBody>
+      </p:sp>
+      <p:sp>
+        <p:nvSpPr>
+          <p:cNvPr id="82" name="Text 21">
+            <a:extLst>
+              <a:ext uri="{FF2B5EF4-FFF2-40B4-BE49-F238E27FC236}">
+                <a16:creationId xmlns:a16="http://schemas.microsoft.com/office/drawing/2014/main" id="{67472FCD-4B2E-40F0-86C3-832C16AADE22}"/>
+              </a:ext>
+            </a:extLst>
+          </p:cNvPr>
+          <p:cNvSpPr/>
+          <p:nvPr/>
+        </p:nvSpPr>
+        <p:spPr>
+          <a:xfrm>
+            <a:off x="987552" y="3794760"/>
+            <a:ext cx="7589520" cy="256032"/>
+          </a:xfrm>
+          <a:prstGeom prst="rect">
+            <a:avLst/>
+          </a:prstGeom>
+          <a:noFill/>
+          <a:ln/>
+        </p:spPr>
+        <p:txBody>
+          <a:bodyPr wrap="square" lIns="0" tIns="0" rIns="0" bIns="0" rtlCol="0" anchor="ctr"/>
+          <a:lstStyle/>
+          <a:p>
+            <a:pPr marL="0" indent="0">
+              <a:buNone/>
+            </a:pPr>
+            <a:r>
+              <a:rPr lang="en-US" sz="1050" dirty="0">
+                <a:solidFill>
+                  <a:srgbClr val="555555"/>
+                </a:solidFill>
+                <a:latin typeface="Archivo" panose="020B0604020202020204" charset="0"/>
+                <a:ea typeface="Calibri" pitchFamily="34" charset="-122"/>
+                <a:cs typeface="Archivo" panose="020B0604020202020204" charset="0"/>
+              </a:rPr>
+              <a:t>Limited visibility into demographic SIP patterns</a:t>
+            </a:r>
+            <a:endParaRPr lang="en-US" sz="1050" dirty="0">
+              <a:latin typeface="Archivo" panose="020B0604020202020204" charset="0"/>
+              <a:cs typeface="Archivo" panose="020B0604020202020204" charset="0"/>
+            </a:endParaRPr>
+          </a:p>
+        </p:txBody>
+      </p:sp>
+      <p:sp>
+        <p:nvSpPr>
+          <p:cNvPr id="83" name="Shape 22">
+            <a:extLst>
+              <a:ext uri="{FF2B5EF4-FFF2-40B4-BE49-F238E27FC236}">
+                <a16:creationId xmlns:a16="http://schemas.microsoft.com/office/drawing/2014/main" id="{61324C39-9518-4C6F-B094-BECB75210171}"/>
+              </a:ext>
+            </a:extLst>
+          </p:cNvPr>
+          <p:cNvSpPr/>
+          <p:nvPr/>
+        </p:nvSpPr>
+        <p:spPr>
+          <a:xfrm>
+            <a:off x="365760" y="4215384"/>
+            <a:ext cx="8412480" cy="685801"/>
+          </a:xfrm>
+          <a:prstGeom prst="roundRect">
+            <a:avLst>
+              <a:gd name="adj" fmla="val 9333"/>
+            </a:avLst>
+          </a:prstGeom>
+          <a:solidFill>
+            <a:srgbClr val="FFFFFF"/>
+          </a:solidFill>
+          <a:ln/>
+          <a:effectLst>
+            <a:outerShdw blurRad="101600" dist="38100" dir="2700000" algn="bl" rotWithShape="0">
+              <a:srgbClr val="000000">
+                <a:alpha val="18000"/>
+              </a:srgbClr>
+            </a:outerShdw>
+          </a:effectLst>
+        </p:spPr>
+      </p:sp>
+      <p:sp>
+        <p:nvSpPr>
+          <p:cNvPr id="84" name="Shape 23">
+            <a:extLst>
+              <a:ext uri="{FF2B5EF4-FFF2-40B4-BE49-F238E27FC236}">
+                <a16:creationId xmlns:a16="http://schemas.microsoft.com/office/drawing/2014/main" id="{CE4C8037-6885-4B7D-8197-529FD867841B}"/>
+              </a:ext>
+            </a:extLst>
+          </p:cNvPr>
+          <p:cNvSpPr/>
+          <p:nvPr/>
+        </p:nvSpPr>
+        <p:spPr>
+          <a:xfrm>
+            <a:off x="365760" y="4215384"/>
+            <a:ext cx="502920" cy="685801"/>
+          </a:xfrm>
+          <a:prstGeom prst="roundRect">
+            <a:avLst>
+              <a:gd name="adj" fmla="val 12727"/>
+            </a:avLst>
+          </a:prstGeom>
+          <a:solidFill>
+            <a:schemeClr val="tx2">
+              <a:lumMod val="75000"/>
+            </a:schemeClr>
+          </a:solidFill>
+          <a:ln/>
+        </p:spPr>
+      </p:sp>
+      <p:sp>
+        <p:nvSpPr>
+          <p:cNvPr id="85" name="Text 24">
+            <a:extLst>
+              <a:ext uri="{FF2B5EF4-FFF2-40B4-BE49-F238E27FC236}">
+                <a16:creationId xmlns:a16="http://schemas.microsoft.com/office/drawing/2014/main" id="{88AFBBE9-15CE-42DF-99BE-AD1079642AC4}"/>
+              </a:ext>
+            </a:extLst>
+          </p:cNvPr>
+          <p:cNvSpPr/>
+          <p:nvPr/>
+        </p:nvSpPr>
+        <p:spPr>
+          <a:xfrm>
+            <a:off x="365760" y="4379976"/>
+            <a:ext cx="502920" cy="347472"/>
+          </a:xfrm>
+          <a:prstGeom prst="rect">
+            <a:avLst/>
+          </a:prstGeom>
+          <a:noFill/>
+          <a:ln/>
+        </p:spPr>
+        <p:txBody>
+          <a:bodyPr wrap="square" lIns="0" tIns="0" rIns="0" bIns="0" rtlCol="0" anchor="ctr"/>
+          <a:lstStyle/>
+          <a:p>
+            <a:pPr marL="0" indent="0" algn="ctr">
+              <a:buNone/>
+            </a:pPr>
+            <a:r>
+              <a:rPr lang="en-US" sz="1000" b="1" dirty="0">
+                <a:solidFill>
+                  <a:srgbClr val="FFFFFF"/>
+                </a:solidFill>
+                <a:latin typeface="Calibri" pitchFamily="34" charset="0"/>
+                <a:ea typeface="Calibri" pitchFamily="34" charset="-122"/>
+                <a:cs typeface="Calibri" pitchFamily="34" charset="-120"/>
+              </a:rPr>
+              <a:t>P5</a:t>
+            </a:r>
+            <a:endParaRPr lang="en-US" sz="1000" dirty="0"/>
+          </a:p>
+        </p:txBody>
+      </p:sp>
+      <p:sp>
+        <p:nvSpPr>
+          <p:cNvPr id="86" name="Text 25">
+            <a:extLst>
+              <a:ext uri="{FF2B5EF4-FFF2-40B4-BE49-F238E27FC236}">
+                <a16:creationId xmlns:a16="http://schemas.microsoft.com/office/drawing/2014/main" id="{CDC679D0-9AA6-429D-8E0C-3FAD9CDAF831}"/>
+              </a:ext>
+            </a:extLst>
+          </p:cNvPr>
+          <p:cNvSpPr/>
+          <p:nvPr/>
+        </p:nvSpPr>
+        <p:spPr>
+          <a:xfrm>
+            <a:off x="987552" y="4270248"/>
+            <a:ext cx="2286000" cy="274320"/>
+          </a:xfrm>
+          <a:prstGeom prst="rect">
+            <a:avLst/>
+          </a:prstGeom>
+          <a:noFill/>
+          <a:ln/>
+        </p:spPr>
+        <p:txBody>
+          <a:bodyPr wrap="square" lIns="0" tIns="0" rIns="0" bIns="0" rtlCol="0" anchor="ctr"/>
+          <a:lstStyle/>
+          <a:p>
+            <a:pPr marL="0" indent="0">
+              <a:buNone/>
+            </a:pPr>
+            <a:r>
+              <a:rPr lang="en-US" sz="1200" b="1" dirty="0">
+                <a:solidFill>
+                  <a:srgbClr val="0F1923"/>
+                </a:solidFill>
+                <a:latin typeface="Archivo" panose="020B0604020202020204" charset="0"/>
+                <a:ea typeface="Calibri" pitchFamily="34" charset="-122"/>
+                <a:cs typeface="Archivo" panose="020B0604020202020204" charset="0"/>
+              </a:rPr>
+              <a:t>Slow Reporting</a:t>
+            </a:r>
+            <a:endParaRPr lang="en-US" sz="1200" dirty="0">
+              <a:latin typeface="Archivo" panose="020B0604020202020204" charset="0"/>
+              <a:cs typeface="Archivo" panose="020B0604020202020204" charset="0"/>
+            </a:endParaRPr>
+          </a:p>
+        </p:txBody>
+      </p:sp>
+      <p:sp>
+        <p:nvSpPr>
+          <p:cNvPr id="87" name="Text 26">
+            <a:extLst>
+              <a:ext uri="{FF2B5EF4-FFF2-40B4-BE49-F238E27FC236}">
+                <a16:creationId xmlns:a16="http://schemas.microsoft.com/office/drawing/2014/main" id="{9BB10536-46E1-4FE6-B408-777C3B3700C3}"/>
+              </a:ext>
+            </a:extLst>
+          </p:cNvPr>
+          <p:cNvSpPr/>
+          <p:nvPr/>
+        </p:nvSpPr>
+        <p:spPr>
+          <a:xfrm>
+            <a:off x="987552" y="4562856"/>
+            <a:ext cx="7589520" cy="256032"/>
+          </a:xfrm>
+          <a:prstGeom prst="rect">
+            <a:avLst/>
+          </a:prstGeom>
+          <a:noFill/>
+          <a:ln/>
+        </p:spPr>
+        <p:txBody>
+          <a:bodyPr wrap="square" lIns="0" tIns="0" rIns="0" bIns="0" rtlCol="0" anchor="ctr"/>
+          <a:lstStyle/>
+          <a:p>
+            <a:pPr marL="0" indent="0">
+              <a:buNone/>
+            </a:pPr>
+            <a:r>
+              <a:rPr lang="en-US" sz="1050" dirty="0">
+                <a:solidFill>
+                  <a:srgbClr val="555555"/>
+                </a:solidFill>
+                <a:latin typeface="Archivo" panose="020B0604020202020204" charset="0"/>
+                <a:ea typeface="Calibri" pitchFamily="34" charset="-122"/>
+                <a:cs typeface="Archivo" panose="020B0604020202020204" charset="0"/>
+              </a:rPr>
+              <a:t>Monthly static PDFs take days - stakeholders need live dashboards</a:t>
+            </a:r>
+            <a:endParaRPr lang="en-US" sz="1050" dirty="0">
+              <a:latin typeface="Archivo" panose="020B0604020202020204" charset="0"/>
+              <a:cs typeface="Archivo" panose="020B0604020202020204" charset="0"/>
+            </a:endParaRPr>
+          </a:p>
+        </p:txBody>
+      </p:sp>
+    </p:spTree>
+  </p:cSld>
+  <p:clrMapOvr>
+    <a:masterClrMapping/>
+  </p:clrMapOvr>
+</p:sld>
+</file>
+
+<file path=ppt/slides/slide20.xml><?xml version="1.0" encoding="utf-8"?>
+<p:sld xmlns:a="http://schemas.openxmlformats.org/drawingml/2006/main" xmlns:r="http://schemas.openxmlformats.org/officeDocument/2006/relationships" xmlns:p="http://schemas.openxmlformats.org/presentationml/2006/main">
+  <p:cSld>
+    <p:spTree>
+      <p:nvGrpSpPr>
+        <p:cNvPr id="1" name="Shape 261"/>
+        <p:cNvGrpSpPr/>
+        <p:nvPr/>
+      </p:nvGrpSpPr>
+      <p:grpSpPr>
+        <a:xfrm>
+          <a:off x="0" y="0"/>
+          <a:ext cx="0" cy="0"/>
+          <a:chOff x="0" y="0"/>
+          <a:chExt cx="0" cy="0"/>
+        </a:xfrm>
+      </p:grpSpPr>
+      <p:grpSp>
+        <p:nvGrpSpPr>
+          <p:cNvPr id="7" name="Group 6">
+            <a:extLst>
+              <a:ext uri="{FF2B5EF4-FFF2-40B4-BE49-F238E27FC236}">
+                <a16:creationId xmlns:a16="http://schemas.microsoft.com/office/drawing/2014/main" id="{C8E149EB-AB2D-4B07-A020-0056E99EE67E}"/>
+              </a:ext>
+            </a:extLst>
+          </p:cNvPr>
+          <p:cNvGrpSpPr/>
+          <p:nvPr/>
+        </p:nvGrpSpPr>
+        <p:grpSpPr>
+          <a:xfrm>
+            <a:off x="508842" y="179269"/>
+            <a:ext cx="8126315" cy="658368"/>
+            <a:chOff x="219761" y="233057"/>
+            <a:chExt cx="8415396" cy="658368"/>
+          </a:xfrm>
+        </p:grpSpPr>
+        <p:sp>
+          <p:nvSpPr>
+            <p:cNvPr id="21" name="Shape 7">
+              <a:extLst>
+                <a:ext uri="{FF2B5EF4-FFF2-40B4-BE49-F238E27FC236}">
+                  <a16:creationId xmlns:a16="http://schemas.microsoft.com/office/drawing/2014/main" id="{8175D6AF-48D3-4888-B5A8-83523538E2A3}"/>
+                </a:ext>
+              </a:extLst>
+            </p:cNvPr>
+            <p:cNvSpPr/>
+            <p:nvPr/>
+          </p:nvSpPr>
+          <p:spPr>
+            <a:xfrm>
+              <a:off x="219762" y="233057"/>
+              <a:ext cx="8415395" cy="658368"/>
+            </a:xfrm>
+            <a:prstGeom prst="roundRect">
+              <a:avLst>
+                <a:gd name="adj" fmla="val 9722"/>
+              </a:avLst>
+            </a:prstGeom>
+            <a:solidFill>
+              <a:srgbClr val="FFFFFF"/>
+            </a:solidFill>
+            <a:ln/>
+            <a:effectLst>
+              <a:outerShdw blurRad="101600" dist="38100" dir="2700000" algn="bl" rotWithShape="0">
+                <a:srgbClr val="000000">
+                  <a:alpha val="18000"/>
+                </a:srgbClr>
+              </a:outerShdw>
+            </a:effectLst>
+          </p:spPr>
+        </p:sp>
+        <p:sp>
+          <p:nvSpPr>
+            <p:cNvPr id="22" name="Shape 8">
+              <a:extLst>
+                <a:ext uri="{FF2B5EF4-FFF2-40B4-BE49-F238E27FC236}">
+                  <a16:creationId xmlns:a16="http://schemas.microsoft.com/office/drawing/2014/main" id="{B112E886-563F-4F39-A172-BE7EF286BF73}"/>
+                </a:ext>
+              </a:extLst>
+            </p:cNvPr>
+            <p:cNvSpPr/>
+            <p:nvPr/>
+          </p:nvSpPr>
+          <p:spPr>
+            <a:xfrm>
+              <a:off x="219762" y="233057"/>
+              <a:ext cx="660015" cy="658368"/>
+            </a:xfrm>
+            <a:prstGeom prst="roundRect">
+              <a:avLst>
+                <a:gd name="adj" fmla="val 9722"/>
+              </a:avLst>
+            </a:prstGeom>
+            <a:solidFill>
+              <a:schemeClr val="tx2">
+                <a:lumMod val="75000"/>
+              </a:schemeClr>
+            </a:solidFill>
+            <a:ln/>
+          </p:spPr>
+        </p:sp>
+        <p:sp>
+          <p:nvSpPr>
+            <p:cNvPr id="23" name="Text 9">
+              <a:extLst>
+                <a:ext uri="{FF2B5EF4-FFF2-40B4-BE49-F238E27FC236}">
+                  <a16:creationId xmlns:a16="http://schemas.microsoft.com/office/drawing/2014/main" id="{9BC1B9C4-C46A-4BE2-8625-820F633C17CA}"/>
+                </a:ext>
+              </a:extLst>
+            </p:cNvPr>
+            <p:cNvSpPr/>
+            <p:nvPr/>
+          </p:nvSpPr>
+          <p:spPr>
+            <a:xfrm>
+              <a:off x="219761" y="397649"/>
+              <a:ext cx="660015" cy="320040"/>
+            </a:xfrm>
+            <a:prstGeom prst="rect">
+              <a:avLst/>
+            </a:prstGeom>
+            <a:noFill/>
+            <a:ln/>
+          </p:spPr>
+          <p:txBody>
+            <a:bodyPr wrap="square" lIns="0" tIns="0" rIns="0" bIns="0" rtlCol="0" anchor="ctr"/>
+            <a:lstStyle/>
+            <a:p>
+              <a:pPr marL="0" indent="0" algn="ctr">
+                <a:buNone/>
+              </a:pPr>
+              <a:r>
+                <a:rPr lang="en-US" sz="1200" b="1" dirty="0">
+                  <a:solidFill>
+                    <a:srgbClr val="FFFFFF"/>
+                  </a:solidFill>
+                  <a:latin typeface="Calibri" pitchFamily="34" charset="0"/>
+                  <a:ea typeface="Calibri" pitchFamily="34" charset="-122"/>
+                  <a:cs typeface="Calibri" pitchFamily="34" charset="-120"/>
+                </a:rPr>
+                <a:t>B2</a:t>
+              </a:r>
+              <a:endParaRPr lang="en-US" sz="1200" dirty="0"/>
+            </a:p>
+          </p:txBody>
+        </p:sp>
+        <p:sp>
+          <p:nvSpPr>
+            <p:cNvPr id="24" name="Text 10">
+              <a:extLst>
+                <a:ext uri="{FF2B5EF4-FFF2-40B4-BE49-F238E27FC236}">
+                  <a16:creationId xmlns:a16="http://schemas.microsoft.com/office/drawing/2014/main" id="{686B51F8-9E1B-4785-A5A3-F7EC3DFEDA0A}"/>
+                </a:ext>
+              </a:extLst>
+            </p:cNvPr>
+            <p:cNvSpPr/>
+            <p:nvPr/>
+          </p:nvSpPr>
+          <p:spPr>
+            <a:xfrm>
+              <a:off x="1064962" y="420509"/>
+              <a:ext cx="6227186" cy="240318"/>
+            </a:xfrm>
+            <a:prstGeom prst="rect">
+              <a:avLst/>
+            </a:prstGeom>
+            <a:noFill/>
+            <a:ln/>
+          </p:spPr>
+          <p:txBody>
+            <a:bodyPr wrap="square" lIns="0" tIns="0" rIns="0" bIns="0" rtlCol="0" anchor="ctr"/>
+            <a:lstStyle/>
+            <a:p>
+              <a:pPr marL="0" indent="0">
+                <a:buNone/>
+              </a:pPr>
+              <a:r>
+                <a:rPr lang="en-IN" sz="1200" b="1" spc="300" dirty="0">
+                  <a:latin typeface="Archivo" panose="020B0604020202020204" charset="0"/>
+                  <a:ea typeface="Calibri" panose="020F0502020204030204" pitchFamily="34" charset="0"/>
+                  <a:cs typeface="Archivo" panose="020B0604020202020204" charset="0"/>
+                </a:rPr>
+                <a:t>AUTOMATED HTML EMAIL REPORT</a:t>
+              </a:r>
+              <a:endParaRPr lang="en-US" b="1" spc="300" dirty="0">
+                <a:latin typeface="Archivo" panose="020B0604020202020204" charset="0"/>
+                <a:ea typeface="Calibri" panose="020F0502020204030204" pitchFamily="34" charset="0"/>
+                <a:cs typeface="Archivo" panose="020B0604020202020204" charset="0"/>
+              </a:endParaRPr>
+            </a:p>
+          </p:txBody>
+        </p:sp>
+      </p:grpSp>
+      <p:pic>
+        <p:nvPicPr>
+          <p:cNvPr id="3" name="Picture 2">
+            <a:extLst>
+              <a:ext uri="{FF2B5EF4-FFF2-40B4-BE49-F238E27FC236}">
+                <a16:creationId xmlns:a16="http://schemas.microsoft.com/office/drawing/2014/main" id="{4A6FA97D-B6D7-43D9-B33C-F83B838DAD1F}"/>
+              </a:ext>
+            </a:extLst>
+          </p:cNvPr>
+          <p:cNvPicPr>
+            <a:picLocks noChangeAspect="1"/>
+          </p:cNvPicPr>
+          <p:nvPr/>
+        </p:nvPicPr>
+        <p:blipFill>
+          <a:blip r:embed="rId3"/>
+          <a:stretch>
+            <a:fillRect/>
+          </a:stretch>
+        </p:blipFill>
+        <p:spPr>
+          <a:xfrm>
+            <a:off x="793642" y="1082593"/>
+            <a:ext cx="7556715" cy="3566248"/>
+          </a:xfrm>
+          <a:prstGeom prst="rect">
+            <a:avLst/>
+          </a:prstGeom>
+        </p:spPr>
+      </p:pic>
+    </p:spTree>
+    <p:extLst>
+      <p:ext uri="{BB962C8B-B14F-4D97-AF65-F5344CB8AC3E}">
+        <p14:creationId xmlns:p14="http://schemas.microsoft.com/office/powerpoint/2010/main" val="3862530658"/>
+      </p:ext>
+    </p:extLst>
+  </p:cSld>
+  <p:clrMapOvr>
+    <a:masterClrMapping/>
+  </p:clrMapOvr>
+</p:sld>
+</file>
+
+<file path=ppt/slides/slide21.xml><?xml version="1.0" encoding="utf-8"?>
+<p:sld xmlns:a="http://schemas.openxmlformats.org/drawingml/2006/main" xmlns:r="http://schemas.openxmlformats.org/officeDocument/2006/relationships" xmlns:p="http://schemas.openxmlformats.org/presentationml/2006/main">
+  <p:cSld>
+    <p:spTree>
+      <p:nvGrpSpPr>
         <p:cNvPr id="1" name="Shape 271"/>
         <p:cNvGrpSpPr/>
         <p:nvPr/>
@@ -20056,7 +22604,7 @@
 </p:sld>
 </file>
 
-<file path=ppt/slides/slide19.xml><?xml version="1.0" encoding="utf-8"?>
+<file path=ppt/slides/slide22.xml><?xml version="1.0" encoding="utf-8"?>
 <p:sld xmlns:a="http://schemas.openxmlformats.org/drawingml/2006/main" xmlns:r="http://schemas.openxmlformats.org/officeDocument/2006/relationships" xmlns:p="http://schemas.openxmlformats.org/presentationml/2006/main">
   <p:cSld>
     <p:spTree>
@@ -20207,1103 +22755,6 @@
                   <a:lumMod val="10000"/>
                 </a:schemeClr>
               </a:solidFill>
-            </a:endParaRPr>
-          </a:p>
-        </p:txBody>
-      </p:sp>
-    </p:spTree>
-  </p:cSld>
-  <p:clrMapOvr>
-    <a:masterClrMapping/>
-  </p:clrMapOvr>
-</p:sld>
-</file>
-
-<file path=ppt/slides/slide2.xml><?xml version="1.0" encoding="utf-8"?>
-<p:sld xmlns:a="http://schemas.openxmlformats.org/drawingml/2006/main" xmlns:r="http://schemas.openxmlformats.org/officeDocument/2006/relationships" xmlns:p="http://schemas.openxmlformats.org/presentationml/2006/main">
-  <p:cSld>
-    <p:spTree>
-      <p:nvGrpSpPr>
-        <p:cNvPr id="1" name="Shape 148"/>
-        <p:cNvGrpSpPr/>
-        <p:nvPr/>
-      </p:nvGrpSpPr>
-      <p:grpSpPr>
-        <a:xfrm>
-          <a:off x="0" y="0"/>
-          <a:ext cx="0" cy="0"/>
-          <a:chOff x="0" y="0"/>
-          <a:chExt cx="0" cy="0"/>
-        </a:xfrm>
-      </p:grpSpPr>
-      <p:sp>
-        <p:nvSpPr>
-          <p:cNvPr id="149" name="Google Shape;149;p29"/>
-          <p:cNvSpPr txBox="1">
-            <a:spLocks noGrp="1"/>
-          </p:cNvSpPr>
-          <p:nvPr>
-            <p:ph type="title"/>
-          </p:nvPr>
-        </p:nvSpPr>
-        <p:spPr>
-          <a:xfrm>
-            <a:off x="720000" y="164241"/>
-            <a:ext cx="7704000" cy="702000"/>
-          </a:xfrm>
-          <a:prstGeom prst="rect">
-            <a:avLst/>
-          </a:prstGeom>
-        </p:spPr>
-        <p:txBody>
-          <a:bodyPr spcFirstLastPara="1" wrap="square" lIns="91425" tIns="91425" rIns="91425" bIns="91425" anchor="ctr" anchorCtr="0">
-            <a:noAutofit/>
-          </a:bodyPr>
-          <a:lstStyle/>
-          <a:p>
-            <a:pPr marL="0" lvl="0" indent="0" algn="l" rtl="0">
-              <a:spcBef>
-                <a:spcPts val="0"/>
-              </a:spcBef>
-              <a:spcAft>
-                <a:spcPts val="0"/>
-              </a:spcAft>
-              <a:buNone/>
-            </a:pPr>
-            <a:r>
-              <a:rPr lang="en-IN" dirty="0"/>
-              <a:t>PROBLEM STATEMENT AND OBJECTIVE</a:t>
-            </a:r>
-            <a:endParaRPr dirty="0"/>
-          </a:p>
-        </p:txBody>
-      </p:sp>
-      <p:sp>
-        <p:nvSpPr>
-          <p:cNvPr id="63" name="Shape 2">
-            <a:extLst>
-              <a:ext uri="{FF2B5EF4-FFF2-40B4-BE49-F238E27FC236}">
-                <a16:creationId xmlns:a16="http://schemas.microsoft.com/office/drawing/2014/main" id="{D3BFD681-0649-45DE-9E95-A65B77CC7B9F}"/>
-              </a:ext>
-            </a:extLst>
-          </p:cNvPr>
-          <p:cNvSpPr/>
-          <p:nvPr/>
-        </p:nvSpPr>
-        <p:spPr>
-          <a:xfrm>
-            <a:off x="365760" y="1143000"/>
-            <a:ext cx="8412480" cy="685801"/>
-          </a:xfrm>
-          <a:prstGeom prst="roundRect">
-            <a:avLst>
-              <a:gd name="adj" fmla="val 9333"/>
-            </a:avLst>
-          </a:prstGeom>
-          <a:solidFill>
-            <a:srgbClr val="FFFFFF"/>
-          </a:solidFill>
-          <a:ln/>
-          <a:effectLst>
-            <a:outerShdw blurRad="101600" dist="38100" dir="2700000" algn="bl" rotWithShape="0">
-              <a:srgbClr val="000000">
-                <a:alpha val="18000"/>
-              </a:srgbClr>
-            </a:outerShdw>
-          </a:effectLst>
-        </p:spPr>
-      </p:sp>
-      <p:sp>
-        <p:nvSpPr>
-          <p:cNvPr id="64" name="Shape 3">
-            <a:extLst>
-              <a:ext uri="{FF2B5EF4-FFF2-40B4-BE49-F238E27FC236}">
-                <a16:creationId xmlns:a16="http://schemas.microsoft.com/office/drawing/2014/main" id="{32DB3D78-2FE7-4FB6-B20A-10D9D47B6737}"/>
-              </a:ext>
-            </a:extLst>
-          </p:cNvPr>
-          <p:cNvSpPr/>
-          <p:nvPr/>
-        </p:nvSpPr>
-        <p:spPr>
-          <a:xfrm>
-            <a:off x="365760" y="1143000"/>
-            <a:ext cx="502920" cy="685801"/>
-          </a:xfrm>
-          <a:prstGeom prst="roundRect">
-            <a:avLst>
-              <a:gd name="adj" fmla="val 12727"/>
-            </a:avLst>
-          </a:prstGeom>
-          <a:solidFill>
-            <a:schemeClr val="tx2">
-              <a:lumMod val="75000"/>
-            </a:schemeClr>
-          </a:solidFill>
-          <a:ln/>
-        </p:spPr>
-      </p:sp>
-      <p:sp>
-        <p:nvSpPr>
-          <p:cNvPr id="65" name="Text 4">
-            <a:extLst>
-              <a:ext uri="{FF2B5EF4-FFF2-40B4-BE49-F238E27FC236}">
-                <a16:creationId xmlns:a16="http://schemas.microsoft.com/office/drawing/2014/main" id="{C173DC22-454F-4E46-95A3-BD7C7A3306FE}"/>
-              </a:ext>
-            </a:extLst>
-          </p:cNvPr>
-          <p:cNvSpPr/>
-          <p:nvPr/>
-        </p:nvSpPr>
-        <p:spPr>
-          <a:xfrm>
-            <a:off x="365760" y="1307592"/>
-            <a:ext cx="502920" cy="347472"/>
-          </a:xfrm>
-          <a:prstGeom prst="rect">
-            <a:avLst/>
-          </a:prstGeom>
-          <a:noFill/>
-          <a:ln/>
-        </p:spPr>
-        <p:txBody>
-          <a:bodyPr wrap="square" lIns="0" tIns="0" rIns="0" bIns="0" rtlCol="0" anchor="ctr"/>
-          <a:lstStyle/>
-          <a:p>
-            <a:pPr marL="0" indent="0" algn="ctr">
-              <a:buNone/>
-            </a:pPr>
-            <a:r>
-              <a:rPr lang="en-US" sz="1000" b="1" dirty="0">
-                <a:solidFill>
-                  <a:srgbClr val="FFFFFF"/>
-                </a:solidFill>
-                <a:latin typeface="Calibri" pitchFamily="34" charset="0"/>
-                <a:ea typeface="Calibri" pitchFamily="34" charset="-122"/>
-                <a:cs typeface="Calibri" pitchFamily="34" charset="-120"/>
-              </a:rPr>
-              <a:t>P1</a:t>
-            </a:r>
-            <a:endParaRPr lang="en-US" sz="1000" dirty="0"/>
-          </a:p>
-        </p:txBody>
-      </p:sp>
-      <p:sp>
-        <p:nvSpPr>
-          <p:cNvPr id="66" name="Text 5">
-            <a:extLst>
-              <a:ext uri="{FF2B5EF4-FFF2-40B4-BE49-F238E27FC236}">
-                <a16:creationId xmlns:a16="http://schemas.microsoft.com/office/drawing/2014/main" id="{008CFF3D-4BD1-4DCF-A0D0-1BE1753AA642}"/>
-              </a:ext>
-            </a:extLst>
-          </p:cNvPr>
-          <p:cNvSpPr/>
-          <p:nvPr/>
-        </p:nvSpPr>
-        <p:spPr>
-          <a:xfrm>
-            <a:off x="987552" y="1197864"/>
-            <a:ext cx="2286000" cy="274320"/>
-          </a:xfrm>
-          <a:prstGeom prst="rect">
-            <a:avLst/>
-          </a:prstGeom>
-          <a:noFill/>
-          <a:ln/>
-        </p:spPr>
-        <p:txBody>
-          <a:bodyPr wrap="square" lIns="0" tIns="0" rIns="0" bIns="0" rtlCol="0" anchor="ctr"/>
-          <a:lstStyle/>
-          <a:p>
-            <a:pPr marL="0" indent="0">
-              <a:buNone/>
-            </a:pPr>
-            <a:r>
-              <a:rPr lang="en-US" sz="1200" b="1" dirty="0">
-                <a:solidFill>
-                  <a:srgbClr val="0F1923"/>
-                </a:solidFill>
-                <a:latin typeface="Archivo" panose="020B0604020202020204" charset="0"/>
-                <a:ea typeface="Calibri" pitchFamily="34" charset="-122"/>
-                <a:cs typeface="Archivo" panose="020B0604020202020204" charset="0"/>
-              </a:rPr>
-              <a:t>Data Fragmentation</a:t>
-            </a:r>
-            <a:endParaRPr lang="en-US" sz="1200" dirty="0">
-              <a:latin typeface="Archivo" panose="020B0604020202020204" charset="0"/>
-              <a:cs typeface="Archivo" panose="020B0604020202020204" charset="0"/>
-            </a:endParaRPr>
-          </a:p>
-        </p:txBody>
-      </p:sp>
-      <p:sp>
-        <p:nvSpPr>
-          <p:cNvPr id="67" name="Text 6">
-            <a:extLst>
-              <a:ext uri="{FF2B5EF4-FFF2-40B4-BE49-F238E27FC236}">
-                <a16:creationId xmlns:a16="http://schemas.microsoft.com/office/drawing/2014/main" id="{5A5BDBAF-9DE2-4210-9FAD-8C6ACE50A06C}"/>
-              </a:ext>
-            </a:extLst>
-          </p:cNvPr>
-          <p:cNvSpPr/>
-          <p:nvPr/>
-        </p:nvSpPr>
-        <p:spPr>
-          <a:xfrm>
-            <a:off x="987552" y="1490472"/>
-            <a:ext cx="7589520" cy="256032"/>
-          </a:xfrm>
-          <a:prstGeom prst="rect">
-            <a:avLst/>
-          </a:prstGeom>
-          <a:noFill/>
-          <a:ln/>
-        </p:spPr>
-        <p:txBody>
-          <a:bodyPr wrap="square" lIns="0" tIns="0" rIns="0" bIns="0" rtlCol="0" anchor="ctr"/>
-          <a:lstStyle/>
-          <a:p>
-            <a:pPr marL="0" indent="0">
-              <a:buNone/>
-            </a:pPr>
-            <a:r>
-              <a:rPr lang="en-US" sz="1050" dirty="0">
-                <a:solidFill>
-                  <a:srgbClr val="555555"/>
-                </a:solidFill>
-                <a:latin typeface="Archivo" panose="020B0604020202020204" charset="0"/>
-                <a:ea typeface="Calibri" pitchFamily="34" charset="-122"/>
-                <a:cs typeface="Archivo" panose="020B0604020202020204" charset="0"/>
-              </a:rPr>
-              <a:t>NAV, AUM, SIP and holdings data scattered across different AMFI formats</a:t>
-            </a:r>
-            <a:endParaRPr lang="en-US" sz="1050" dirty="0">
-              <a:latin typeface="Archivo" panose="020B0604020202020204" charset="0"/>
-              <a:cs typeface="Archivo" panose="020B0604020202020204" charset="0"/>
-            </a:endParaRPr>
-          </a:p>
-        </p:txBody>
-      </p:sp>
-      <p:sp>
-        <p:nvSpPr>
-          <p:cNvPr id="68" name="Shape 7">
-            <a:extLst>
-              <a:ext uri="{FF2B5EF4-FFF2-40B4-BE49-F238E27FC236}">
-                <a16:creationId xmlns:a16="http://schemas.microsoft.com/office/drawing/2014/main" id="{7AF80FF0-43B7-41C6-AAE6-75C502BCFE57}"/>
-              </a:ext>
-            </a:extLst>
-          </p:cNvPr>
-          <p:cNvSpPr/>
-          <p:nvPr/>
-        </p:nvSpPr>
-        <p:spPr>
-          <a:xfrm>
-            <a:off x="365760" y="1911096"/>
-            <a:ext cx="8412480" cy="685801"/>
-          </a:xfrm>
-          <a:prstGeom prst="roundRect">
-            <a:avLst>
-              <a:gd name="adj" fmla="val 9333"/>
-            </a:avLst>
-          </a:prstGeom>
-          <a:solidFill>
-            <a:srgbClr val="FFFFFF"/>
-          </a:solidFill>
-          <a:ln/>
-          <a:effectLst>
-            <a:outerShdw blurRad="101600" dist="38100" dir="2700000" algn="bl" rotWithShape="0">
-              <a:srgbClr val="000000">
-                <a:alpha val="18000"/>
-              </a:srgbClr>
-            </a:outerShdw>
-          </a:effectLst>
-        </p:spPr>
-      </p:sp>
-      <p:sp>
-        <p:nvSpPr>
-          <p:cNvPr id="69" name="Shape 8">
-            <a:extLst>
-              <a:ext uri="{FF2B5EF4-FFF2-40B4-BE49-F238E27FC236}">
-                <a16:creationId xmlns:a16="http://schemas.microsoft.com/office/drawing/2014/main" id="{8F1CB52D-E8E3-47A5-A195-0D2442D92E85}"/>
-              </a:ext>
-            </a:extLst>
-          </p:cNvPr>
-          <p:cNvSpPr/>
-          <p:nvPr/>
-        </p:nvSpPr>
-        <p:spPr>
-          <a:xfrm>
-            <a:off x="365760" y="1911096"/>
-            <a:ext cx="502920" cy="685801"/>
-          </a:xfrm>
-          <a:prstGeom prst="roundRect">
-            <a:avLst>
-              <a:gd name="adj" fmla="val 12727"/>
-            </a:avLst>
-          </a:prstGeom>
-          <a:solidFill>
-            <a:schemeClr val="tx2">
-              <a:lumMod val="75000"/>
-            </a:schemeClr>
-          </a:solidFill>
-          <a:ln/>
-        </p:spPr>
-      </p:sp>
-      <p:sp>
-        <p:nvSpPr>
-          <p:cNvPr id="70" name="Text 9">
-            <a:extLst>
-              <a:ext uri="{FF2B5EF4-FFF2-40B4-BE49-F238E27FC236}">
-                <a16:creationId xmlns:a16="http://schemas.microsoft.com/office/drawing/2014/main" id="{85E2EDC0-9456-4B9A-AC95-6EB8687AB982}"/>
-              </a:ext>
-            </a:extLst>
-          </p:cNvPr>
-          <p:cNvSpPr/>
-          <p:nvPr/>
-        </p:nvSpPr>
-        <p:spPr>
-          <a:xfrm>
-            <a:off x="365760" y="2075688"/>
-            <a:ext cx="502920" cy="347472"/>
-          </a:xfrm>
-          <a:prstGeom prst="rect">
-            <a:avLst/>
-          </a:prstGeom>
-          <a:noFill/>
-          <a:ln/>
-        </p:spPr>
-        <p:txBody>
-          <a:bodyPr wrap="square" lIns="0" tIns="0" rIns="0" bIns="0" rtlCol="0" anchor="ctr"/>
-          <a:lstStyle/>
-          <a:p>
-            <a:pPr marL="0" indent="0" algn="ctr">
-              <a:buNone/>
-            </a:pPr>
-            <a:r>
-              <a:rPr lang="en-US" sz="1000" b="1" dirty="0">
-                <a:solidFill>
-                  <a:srgbClr val="FFFFFF"/>
-                </a:solidFill>
-                <a:latin typeface="Calibri" pitchFamily="34" charset="0"/>
-                <a:ea typeface="Calibri" pitchFamily="34" charset="-122"/>
-                <a:cs typeface="Calibri" pitchFamily="34" charset="-120"/>
-              </a:rPr>
-              <a:t>P2</a:t>
-            </a:r>
-            <a:endParaRPr lang="en-US" sz="1000" dirty="0"/>
-          </a:p>
-        </p:txBody>
-      </p:sp>
-      <p:sp>
-        <p:nvSpPr>
-          <p:cNvPr id="71" name="Text 10">
-            <a:extLst>
-              <a:ext uri="{FF2B5EF4-FFF2-40B4-BE49-F238E27FC236}">
-                <a16:creationId xmlns:a16="http://schemas.microsoft.com/office/drawing/2014/main" id="{C5B7F415-A1AB-4D1C-81D5-7ED8FCF23B34}"/>
-              </a:ext>
-            </a:extLst>
-          </p:cNvPr>
-          <p:cNvSpPr/>
-          <p:nvPr/>
-        </p:nvSpPr>
-        <p:spPr>
-          <a:xfrm>
-            <a:off x="987552" y="1965960"/>
-            <a:ext cx="2286000" cy="274320"/>
-          </a:xfrm>
-          <a:prstGeom prst="rect">
-            <a:avLst/>
-          </a:prstGeom>
-          <a:noFill/>
-          <a:ln/>
-        </p:spPr>
-        <p:txBody>
-          <a:bodyPr wrap="square" lIns="0" tIns="0" rIns="0" bIns="0" rtlCol="0" anchor="ctr"/>
-          <a:lstStyle/>
-          <a:p>
-            <a:pPr marL="0" indent="0">
-              <a:buNone/>
-            </a:pPr>
-            <a:r>
-              <a:rPr lang="en-US" sz="1200" b="1" dirty="0">
-                <a:solidFill>
-                  <a:srgbClr val="0F1923"/>
-                </a:solidFill>
-                <a:latin typeface="Archivo" panose="020B0604020202020204" charset="0"/>
-                <a:ea typeface="Calibri" pitchFamily="34" charset="-122"/>
-                <a:cs typeface="Archivo" panose="020B0604020202020204" charset="0"/>
-              </a:rPr>
-              <a:t>Performance Gap</a:t>
-            </a:r>
-            <a:endParaRPr lang="en-US" sz="1200" dirty="0">
-              <a:latin typeface="Archivo" panose="020B0604020202020204" charset="0"/>
-              <a:cs typeface="Archivo" panose="020B0604020202020204" charset="0"/>
-            </a:endParaRPr>
-          </a:p>
-        </p:txBody>
-      </p:sp>
-      <p:sp>
-        <p:nvSpPr>
-          <p:cNvPr id="72" name="Text 11">
-            <a:extLst>
-              <a:ext uri="{FF2B5EF4-FFF2-40B4-BE49-F238E27FC236}">
-                <a16:creationId xmlns:a16="http://schemas.microsoft.com/office/drawing/2014/main" id="{EFC11ACA-67CA-41BA-B926-E3B9178323A8}"/>
-              </a:ext>
-            </a:extLst>
-          </p:cNvPr>
-          <p:cNvSpPr/>
-          <p:nvPr/>
-        </p:nvSpPr>
-        <p:spPr>
-          <a:xfrm>
-            <a:off x="987552" y="2258568"/>
-            <a:ext cx="7589520" cy="256032"/>
-          </a:xfrm>
-          <a:prstGeom prst="rect">
-            <a:avLst/>
-          </a:prstGeom>
-          <a:noFill/>
-          <a:ln/>
-        </p:spPr>
-        <p:txBody>
-          <a:bodyPr wrap="square" lIns="0" tIns="0" rIns="0" bIns="0" rtlCol="0" anchor="ctr"/>
-          <a:lstStyle/>
-          <a:p>
-            <a:pPr marL="0" indent="0">
-              <a:buNone/>
-            </a:pPr>
-            <a:r>
-              <a:rPr lang="en-US" sz="1050" dirty="0">
-                <a:solidFill>
-                  <a:srgbClr val="555555"/>
-                </a:solidFill>
-                <a:latin typeface="Archivo" panose="020B0604020202020204" charset="0"/>
-                <a:ea typeface="Calibri" pitchFamily="34" charset="-122"/>
-                <a:cs typeface="Archivo" panose="020B0604020202020204" charset="0"/>
-              </a:rPr>
-              <a:t>No unified platform to compare funds on risk-adjusted metrics</a:t>
-            </a:r>
-            <a:endParaRPr lang="en-US" sz="1050" dirty="0">
-              <a:latin typeface="Archivo" panose="020B0604020202020204" charset="0"/>
-              <a:cs typeface="Archivo" panose="020B0604020202020204" charset="0"/>
-            </a:endParaRPr>
-          </a:p>
-        </p:txBody>
-      </p:sp>
-      <p:sp>
-        <p:nvSpPr>
-          <p:cNvPr id="73" name="Shape 12">
-            <a:extLst>
-              <a:ext uri="{FF2B5EF4-FFF2-40B4-BE49-F238E27FC236}">
-                <a16:creationId xmlns:a16="http://schemas.microsoft.com/office/drawing/2014/main" id="{5567E71C-AA57-49AF-A19D-B19D89850AFB}"/>
-              </a:ext>
-            </a:extLst>
-          </p:cNvPr>
-          <p:cNvSpPr/>
-          <p:nvPr/>
-        </p:nvSpPr>
-        <p:spPr>
-          <a:xfrm>
-            <a:off x="365760" y="2679192"/>
-            <a:ext cx="8412480" cy="685801"/>
-          </a:xfrm>
-          <a:prstGeom prst="roundRect">
-            <a:avLst>
-              <a:gd name="adj" fmla="val 9333"/>
-            </a:avLst>
-          </a:prstGeom>
-          <a:solidFill>
-            <a:srgbClr val="FFFFFF"/>
-          </a:solidFill>
-          <a:ln/>
-          <a:effectLst>
-            <a:outerShdw blurRad="101600" dist="38100" dir="2700000" algn="bl" rotWithShape="0">
-              <a:srgbClr val="000000">
-                <a:alpha val="18000"/>
-              </a:srgbClr>
-            </a:outerShdw>
-          </a:effectLst>
-        </p:spPr>
-      </p:sp>
-      <p:sp>
-        <p:nvSpPr>
-          <p:cNvPr id="74" name="Shape 13">
-            <a:extLst>
-              <a:ext uri="{FF2B5EF4-FFF2-40B4-BE49-F238E27FC236}">
-                <a16:creationId xmlns:a16="http://schemas.microsoft.com/office/drawing/2014/main" id="{FEFAFA93-EC06-43C3-8E6A-0625DDA9B24D}"/>
-              </a:ext>
-            </a:extLst>
-          </p:cNvPr>
-          <p:cNvSpPr/>
-          <p:nvPr/>
-        </p:nvSpPr>
-        <p:spPr>
-          <a:xfrm>
-            <a:off x="365760" y="2679192"/>
-            <a:ext cx="502920" cy="685801"/>
-          </a:xfrm>
-          <a:prstGeom prst="roundRect">
-            <a:avLst>
-              <a:gd name="adj" fmla="val 12727"/>
-            </a:avLst>
-          </a:prstGeom>
-          <a:solidFill>
-            <a:schemeClr val="tx2">
-              <a:lumMod val="75000"/>
-            </a:schemeClr>
-          </a:solidFill>
-          <a:ln/>
-        </p:spPr>
-      </p:sp>
-      <p:sp>
-        <p:nvSpPr>
-          <p:cNvPr id="75" name="Text 14">
-            <a:extLst>
-              <a:ext uri="{FF2B5EF4-FFF2-40B4-BE49-F238E27FC236}">
-                <a16:creationId xmlns:a16="http://schemas.microsoft.com/office/drawing/2014/main" id="{7B5824BD-6AFD-4374-9892-A6E0A01B495F}"/>
-              </a:ext>
-            </a:extLst>
-          </p:cNvPr>
-          <p:cNvSpPr/>
-          <p:nvPr/>
-        </p:nvSpPr>
-        <p:spPr>
-          <a:xfrm>
-            <a:off x="365760" y="2843784"/>
-            <a:ext cx="502920" cy="347472"/>
-          </a:xfrm>
-          <a:prstGeom prst="rect">
-            <a:avLst/>
-          </a:prstGeom>
-          <a:noFill/>
-          <a:ln/>
-        </p:spPr>
-        <p:txBody>
-          <a:bodyPr wrap="square" lIns="0" tIns="0" rIns="0" bIns="0" rtlCol="0" anchor="ctr"/>
-          <a:lstStyle/>
-          <a:p>
-            <a:pPr marL="0" indent="0" algn="ctr">
-              <a:buNone/>
-            </a:pPr>
-            <a:r>
-              <a:rPr lang="en-US" sz="1000" b="1" dirty="0">
-                <a:solidFill>
-                  <a:srgbClr val="FFFFFF"/>
-                </a:solidFill>
-                <a:latin typeface="Calibri" pitchFamily="34" charset="0"/>
-                <a:ea typeface="Calibri" pitchFamily="34" charset="-122"/>
-                <a:cs typeface="Calibri" pitchFamily="34" charset="-120"/>
-              </a:rPr>
-              <a:t>P3</a:t>
-            </a:r>
-            <a:endParaRPr lang="en-US" sz="1000" dirty="0"/>
-          </a:p>
-        </p:txBody>
-      </p:sp>
-      <p:sp>
-        <p:nvSpPr>
-          <p:cNvPr id="76" name="Text 15">
-            <a:extLst>
-              <a:ext uri="{FF2B5EF4-FFF2-40B4-BE49-F238E27FC236}">
-                <a16:creationId xmlns:a16="http://schemas.microsoft.com/office/drawing/2014/main" id="{801F5DD4-6AB5-474E-B137-A5EA80530D1D}"/>
-              </a:ext>
-            </a:extLst>
-          </p:cNvPr>
-          <p:cNvSpPr/>
-          <p:nvPr/>
-        </p:nvSpPr>
-        <p:spPr>
-          <a:xfrm>
-            <a:off x="987552" y="2734056"/>
-            <a:ext cx="2286000" cy="274320"/>
-          </a:xfrm>
-          <a:prstGeom prst="rect">
-            <a:avLst/>
-          </a:prstGeom>
-          <a:noFill/>
-          <a:ln/>
-        </p:spPr>
-        <p:txBody>
-          <a:bodyPr wrap="square" lIns="0" tIns="0" rIns="0" bIns="0" rtlCol="0" anchor="ctr"/>
-          <a:lstStyle/>
-          <a:p>
-            <a:pPr marL="0" indent="0">
-              <a:buNone/>
-            </a:pPr>
-            <a:r>
-              <a:rPr lang="en-US" sz="1200" b="1" dirty="0">
-                <a:solidFill>
-                  <a:srgbClr val="0F1923"/>
-                </a:solidFill>
-                <a:latin typeface="Archivo" panose="020B0604020202020204" charset="0"/>
-                <a:ea typeface="Calibri" pitchFamily="34" charset="-122"/>
-                <a:cs typeface="Archivo" panose="020B0604020202020204" charset="0"/>
-              </a:rPr>
-              <a:t>No Benchmark Tracking</a:t>
-            </a:r>
-            <a:endParaRPr lang="en-US" sz="1200" dirty="0">
-              <a:latin typeface="Archivo" panose="020B0604020202020204" charset="0"/>
-              <a:cs typeface="Archivo" panose="020B0604020202020204" charset="0"/>
-            </a:endParaRPr>
-          </a:p>
-        </p:txBody>
-      </p:sp>
-      <p:sp>
-        <p:nvSpPr>
-          <p:cNvPr id="77" name="Text 16">
-            <a:extLst>
-              <a:ext uri="{FF2B5EF4-FFF2-40B4-BE49-F238E27FC236}">
-                <a16:creationId xmlns:a16="http://schemas.microsoft.com/office/drawing/2014/main" id="{BBF17EDA-15F7-4A51-8E17-9E05800BA749}"/>
-              </a:ext>
-            </a:extLst>
-          </p:cNvPr>
-          <p:cNvSpPr/>
-          <p:nvPr/>
-        </p:nvSpPr>
-        <p:spPr>
-          <a:xfrm>
-            <a:off x="987552" y="3026664"/>
-            <a:ext cx="7589520" cy="256032"/>
-          </a:xfrm>
-          <a:prstGeom prst="rect">
-            <a:avLst/>
-          </a:prstGeom>
-          <a:noFill/>
-          <a:ln/>
-        </p:spPr>
-        <p:txBody>
-          <a:bodyPr wrap="square" lIns="0" tIns="0" rIns="0" bIns="0" rtlCol="0" anchor="ctr"/>
-          <a:lstStyle/>
-          <a:p>
-            <a:pPr marL="0" indent="0">
-              <a:buNone/>
-            </a:pPr>
-            <a:r>
-              <a:rPr lang="en-US" sz="1050" dirty="0">
-                <a:solidFill>
-                  <a:srgbClr val="555555"/>
-                </a:solidFill>
-                <a:latin typeface="Archivo" panose="020B0604020202020204" charset="0"/>
-                <a:ea typeface="Calibri" pitchFamily="34" charset="-122"/>
-                <a:cs typeface="Archivo" panose="020B0604020202020204" charset="0"/>
-              </a:rPr>
-              <a:t>Investors cannot see if their fund beats Nifty 50 / Nifty 100</a:t>
-            </a:r>
-            <a:endParaRPr lang="en-US" sz="1050" dirty="0">
-              <a:latin typeface="Archivo" panose="020B0604020202020204" charset="0"/>
-              <a:cs typeface="Archivo" panose="020B0604020202020204" charset="0"/>
-            </a:endParaRPr>
-          </a:p>
-        </p:txBody>
-      </p:sp>
-      <p:sp>
-        <p:nvSpPr>
-          <p:cNvPr id="78" name="Shape 17">
-            <a:extLst>
-              <a:ext uri="{FF2B5EF4-FFF2-40B4-BE49-F238E27FC236}">
-                <a16:creationId xmlns:a16="http://schemas.microsoft.com/office/drawing/2014/main" id="{C11EFAF5-550D-4CC9-9BC3-E8A4DADC621B}"/>
-              </a:ext>
-            </a:extLst>
-          </p:cNvPr>
-          <p:cNvSpPr/>
-          <p:nvPr/>
-        </p:nvSpPr>
-        <p:spPr>
-          <a:xfrm>
-            <a:off x="365760" y="3447288"/>
-            <a:ext cx="8412480" cy="685801"/>
-          </a:xfrm>
-          <a:prstGeom prst="roundRect">
-            <a:avLst>
-              <a:gd name="adj" fmla="val 9333"/>
-            </a:avLst>
-          </a:prstGeom>
-          <a:solidFill>
-            <a:srgbClr val="FFFFFF"/>
-          </a:solidFill>
-          <a:ln/>
-          <a:effectLst>
-            <a:outerShdw blurRad="101600" dist="38100" dir="2700000" algn="bl" rotWithShape="0">
-              <a:srgbClr val="000000">
-                <a:alpha val="18000"/>
-              </a:srgbClr>
-            </a:outerShdw>
-          </a:effectLst>
-        </p:spPr>
-      </p:sp>
-      <p:sp>
-        <p:nvSpPr>
-          <p:cNvPr id="79" name="Shape 18">
-            <a:extLst>
-              <a:ext uri="{FF2B5EF4-FFF2-40B4-BE49-F238E27FC236}">
-                <a16:creationId xmlns:a16="http://schemas.microsoft.com/office/drawing/2014/main" id="{ED4EA6BD-56A8-4FC3-8867-C1759AB56117}"/>
-              </a:ext>
-            </a:extLst>
-          </p:cNvPr>
-          <p:cNvSpPr/>
-          <p:nvPr/>
-        </p:nvSpPr>
-        <p:spPr>
-          <a:xfrm>
-            <a:off x="365760" y="3447288"/>
-            <a:ext cx="502920" cy="685801"/>
-          </a:xfrm>
-          <a:prstGeom prst="roundRect">
-            <a:avLst>
-              <a:gd name="adj" fmla="val 12727"/>
-            </a:avLst>
-          </a:prstGeom>
-          <a:solidFill>
-            <a:schemeClr val="tx2">
-              <a:lumMod val="75000"/>
-            </a:schemeClr>
-          </a:solidFill>
-          <a:ln/>
-        </p:spPr>
-      </p:sp>
-      <p:sp>
-        <p:nvSpPr>
-          <p:cNvPr id="80" name="Text 19">
-            <a:extLst>
-              <a:ext uri="{FF2B5EF4-FFF2-40B4-BE49-F238E27FC236}">
-                <a16:creationId xmlns:a16="http://schemas.microsoft.com/office/drawing/2014/main" id="{98AE421B-CD5A-4C46-A233-2948BF0A8B87}"/>
-              </a:ext>
-            </a:extLst>
-          </p:cNvPr>
-          <p:cNvSpPr/>
-          <p:nvPr/>
-        </p:nvSpPr>
-        <p:spPr>
-          <a:xfrm>
-            <a:off x="365760" y="3611880"/>
-            <a:ext cx="502920" cy="347472"/>
-          </a:xfrm>
-          <a:prstGeom prst="rect">
-            <a:avLst/>
-          </a:prstGeom>
-          <a:noFill/>
-          <a:ln/>
-        </p:spPr>
-        <p:txBody>
-          <a:bodyPr wrap="square" lIns="0" tIns="0" rIns="0" bIns="0" rtlCol="0" anchor="ctr"/>
-          <a:lstStyle/>
-          <a:p>
-            <a:pPr marL="0" indent="0" algn="ctr">
-              <a:buNone/>
-            </a:pPr>
-            <a:r>
-              <a:rPr lang="en-US" sz="1000" b="1" dirty="0">
-                <a:solidFill>
-                  <a:srgbClr val="FFFFFF"/>
-                </a:solidFill>
-                <a:latin typeface="Calibri" pitchFamily="34" charset="0"/>
-                <a:ea typeface="Calibri" pitchFamily="34" charset="-122"/>
-                <a:cs typeface="Calibri" pitchFamily="34" charset="-120"/>
-              </a:rPr>
-              <a:t>P4</a:t>
-            </a:r>
-            <a:endParaRPr lang="en-US" sz="1000" dirty="0"/>
-          </a:p>
-        </p:txBody>
-      </p:sp>
-      <p:sp>
-        <p:nvSpPr>
-          <p:cNvPr id="81" name="Text 20">
-            <a:extLst>
-              <a:ext uri="{FF2B5EF4-FFF2-40B4-BE49-F238E27FC236}">
-                <a16:creationId xmlns:a16="http://schemas.microsoft.com/office/drawing/2014/main" id="{082E2D20-F636-4676-B5A8-26C2BC7C6A88}"/>
-              </a:ext>
-            </a:extLst>
-          </p:cNvPr>
-          <p:cNvSpPr/>
-          <p:nvPr/>
-        </p:nvSpPr>
-        <p:spPr>
-          <a:xfrm>
-            <a:off x="987552" y="3502152"/>
-            <a:ext cx="2286000" cy="274320"/>
-          </a:xfrm>
-          <a:prstGeom prst="rect">
-            <a:avLst/>
-          </a:prstGeom>
-          <a:noFill/>
-          <a:ln/>
-        </p:spPr>
-        <p:txBody>
-          <a:bodyPr wrap="square" lIns="0" tIns="0" rIns="0" bIns="0" rtlCol="0" anchor="ctr"/>
-          <a:lstStyle/>
-          <a:p>
-            <a:pPr marL="0" indent="0">
-              <a:buNone/>
-            </a:pPr>
-            <a:r>
-              <a:rPr lang="en-US" sz="1200" b="1" dirty="0">
-                <a:solidFill>
-                  <a:srgbClr val="0F1923"/>
-                </a:solidFill>
-                <a:latin typeface="Archivo" panose="020B0604020202020204" charset="0"/>
-                <a:ea typeface="Calibri" pitchFamily="34" charset="-122"/>
-                <a:cs typeface="Archivo" panose="020B0604020202020204" charset="0"/>
-              </a:rPr>
-              <a:t>Investor Blind Spot</a:t>
-            </a:r>
-            <a:endParaRPr lang="en-US" sz="1200" dirty="0">
-              <a:latin typeface="Archivo" panose="020B0604020202020204" charset="0"/>
-              <a:cs typeface="Archivo" panose="020B0604020202020204" charset="0"/>
-            </a:endParaRPr>
-          </a:p>
-        </p:txBody>
-      </p:sp>
-      <p:sp>
-        <p:nvSpPr>
-          <p:cNvPr id="82" name="Text 21">
-            <a:extLst>
-              <a:ext uri="{FF2B5EF4-FFF2-40B4-BE49-F238E27FC236}">
-                <a16:creationId xmlns:a16="http://schemas.microsoft.com/office/drawing/2014/main" id="{67472FCD-4B2E-40F0-86C3-832C16AADE22}"/>
-              </a:ext>
-            </a:extLst>
-          </p:cNvPr>
-          <p:cNvSpPr/>
-          <p:nvPr/>
-        </p:nvSpPr>
-        <p:spPr>
-          <a:xfrm>
-            <a:off x="987552" y="3794760"/>
-            <a:ext cx="7589520" cy="256032"/>
-          </a:xfrm>
-          <a:prstGeom prst="rect">
-            <a:avLst/>
-          </a:prstGeom>
-          <a:noFill/>
-          <a:ln/>
-        </p:spPr>
-        <p:txBody>
-          <a:bodyPr wrap="square" lIns="0" tIns="0" rIns="0" bIns="0" rtlCol="0" anchor="ctr"/>
-          <a:lstStyle/>
-          <a:p>
-            <a:pPr marL="0" indent="0">
-              <a:buNone/>
-            </a:pPr>
-            <a:r>
-              <a:rPr lang="en-US" sz="1050" dirty="0">
-                <a:solidFill>
-                  <a:srgbClr val="555555"/>
-                </a:solidFill>
-                <a:latin typeface="Archivo" panose="020B0604020202020204" charset="0"/>
-                <a:ea typeface="Calibri" pitchFamily="34" charset="-122"/>
-                <a:cs typeface="Archivo" panose="020B0604020202020204" charset="0"/>
-              </a:rPr>
-              <a:t>Limited visibility into demographic SIP patterns</a:t>
-            </a:r>
-            <a:endParaRPr lang="en-US" sz="1050" dirty="0">
-              <a:latin typeface="Archivo" panose="020B0604020202020204" charset="0"/>
-              <a:cs typeface="Archivo" panose="020B0604020202020204" charset="0"/>
-            </a:endParaRPr>
-          </a:p>
-        </p:txBody>
-      </p:sp>
-      <p:sp>
-        <p:nvSpPr>
-          <p:cNvPr id="83" name="Shape 22">
-            <a:extLst>
-              <a:ext uri="{FF2B5EF4-FFF2-40B4-BE49-F238E27FC236}">
-                <a16:creationId xmlns:a16="http://schemas.microsoft.com/office/drawing/2014/main" id="{61324C39-9518-4C6F-B094-BECB75210171}"/>
-              </a:ext>
-            </a:extLst>
-          </p:cNvPr>
-          <p:cNvSpPr/>
-          <p:nvPr/>
-        </p:nvSpPr>
-        <p:spPr>
-          <a:xfrm>
-            <a:off x="365760" y="4215384"/>
-            <a:ext cx="8412480" cy="685801"/>
-          </a:xfrm>
-          <a:prstGeom prst="roundRect">
-            <a:avLst>
-              <a:gd name="adj" fmla="val 9333"/>
-            </a:avLst>
-          </a:prstGeom>
-          <a:solidFill>
-            <a:srgbClr val="FFFFFF"/>
-          </a:solidFill>
-          <a:ln/>
-          <a:effectLst>
-            <a:outerShdw blurRad="101600" dist="38100" dir="2700000" algn="bl" rotWithShape="0">
-              <a:srgbClr val="000000">
-                <a:alpha val="18000"/>
-              </a:srgbClr>
-            </a:outerShdw>
-          </a:effectLst>
-        </p:spPr>
-      </p:sp>
-      <p:sp>
-        <p:nvSpPr>
-          <p:cNvPr id="84" name="Shape 23">
-            <a:extLst>
-              <a:ext uri="{FF2B5EF4-FFF2-40B4-BE49-F238E27FC236}">
-                <a16:creationId xmlns:a16="http://schemas.microsoft.com/office/drawing/2014/main" id="{CE4C8037-6885-4B7D-8197-529FD867841B}"/>
-              </a:ext>
-            </a:extLst>
-          </p:cNvPr>
-          <p:cNvSpPr/>
-          <p:nvPr/>
-        </p:nvSpPr>
-        <p:spPr>
-          <a:xfrm>
-            <a:off x="365760" y="4215384"/>
-            <a:ext cx="502920" cy="685801"/>
-          </a:xfrm>
-          <a:prstGeom prst="roundRect">
-            <a:avLst>
-              <a:gd name="adj" fmla="val 12727"/>
-            </a:avLst>
-          </a:prstGeom>
-          <a:solidFill>
-            <a:schemeClr val="tx2">
-              <a:lumMod val="75000"/>
-            </a:schemeClr>
-          </a:solidFill>
-          <a:ln/>
-        </p:spPr>
-      </p:sp>
-      <p:sp>
-        <p:nvSpPr>
-          <p:cNvPr id="85" name="Text 24">
-            <a:extLst>
-              <a:ext uri="{FF2B5EF4-FFF2-40B4-BE49-F238E27FC236}">
-                <a16:creationId xmlns:a16="http://schemas.microsoft.com/office/drawing/2014/main" id="{88AFBBE9-15CE-42DF-99BE-AD1079642AC4}"/>
-              </a:ext>
-            </a:extLst>
-          </p:cNvPr>
-          <p:cNvSpPr/>
-          <p:nvPr/>
-        </p:nvSpPr>
-        <p:spPr>
-          <a:xfrm>
-            <a:off x="365760" y="4379976"/>
-            <a:ext cx="502920" cy="347472"/>
-          </a:xfrm>
-          <a:prstGeom prst="rect">
-            <a:avLst/>
-          </a:prstGeom>
-          <a:noFill/>
-          <a:ln/>
-        </p:spPr>
-        <p:txBody>
-          <a:bodyPr wrap="square" lIns="0" tIns="0" rIns="0" bIns="0" rtlCol="0" anchor="ctr"/>
-          <a:lstStyle/>
-          <a:p>
-            <a:pPr marL="0" indent="0" algn="ctr">
-              <a:buNone/>
-            </a:pPr>
-            <a:r>
-              <a:rPr lang="en-US" sz="1000" b="1" dirty="0">
-                <a:solidFill>
-                  <a:srgbClr val="FFFFFF"/>
-                </a:solidFill>
-                <a:latin typeface="Calibri" pitchFamily="34" charset="0"/>
-                <a:ea typeface="Calibri" pitchFamily="34" charset="-122"/>
-                <a:cs typeface="Calibri" pitchFamily="34" charset="-120"/>
-              </a:rPr>
-              <a:t>P5</a:t>
-            </a:r>
-            <a:endParaRPr lang="en-US" sz="1000" dirty="0"/>
-          </a:p>
-        </p:txBody>
-      </p:sp>
-      <p:sp>
-        <p:nvSpPr>
-          <p:cNvPr id="86" name="Text 25">
-            <a:extLst>
-              <a:ext uri="{FF2B5EF4-FFF2-40B4-BE49-F238E27FC236}">
-                <a16:creationId xmlns:a16="http://schemas.microsoft.com/office/drawing/2014/main" id="{CDC679D0-9AA6-429D-8E0C-3FAD9CDAF831}"/>
-              </a:ext>
-            </a:extLst>
-          </p:cNvPr>
-          <p:cNvSpPr/>
-          <p:nvPr/>
-        </p:nvSpPr>
-        <p:spPr>
-          <a:xfrm>
-            <a:off x="987552" y="4270248"/>
-            <a:ext cx="2286000" cy="274320"/>
-          </a:xfrm>
-          <a:prstGeom prst="rect">
-            <a:avLst/>
-          </a:prstGeom>
-          <a:noFill/>
-          <a:ln/>
-        </p:spPr>
-        <p:txBody>
-          <a:bodyPr wrap="square" lIns="0" tIns="0" rIns="0" bIns="0" rtlCol="0" anchor="ctr"/>
-          <a:lstStyle/>
-          <a:p>
-            <a:pPr marL="0" indent="0">
-              <a:buNone/>
-            </a:pPr>
-            <a:r>
-              <a:rPr lang="en-US" sz="1200" b="1" dirty="0">
-                <a:solidFill>
-                  <a:srgbClr val="0F1923"/>
-                </a:solidFill>
-                <a:latin typeface="Archivo" panose="020B0604020202020204" charset="0"/>
-                <a:ea typeface="Calibri" pitchFamily="34" charset="-122"/>
-                <a:cs typeface="Archivo" panose="020B0604020202020204" charset="0"/>
-              </a:rPr>
-              <a:t>Slow Reporting</a:t>
-            </a:r>
-            <a:endParaRPr lang="en-US" sz="1200" dirty="0">
-              <a:latin typeface="Archivo" panose="020B0604020202020204" charset="0"/>
-              <a:cs typeface="Archivo" panose="020B0604020202020204" charset="0"/>
-            </a:endParaRPr>
-          </a:p>
-        </p:txBody>
-      </p:sp>
-      <p:sp>
-        <p:nvSpPr>
-          <p:cNvPr id="87" name="Text 26">
-            <a:extLst>
-              <a:ext uri="{FF2B5EF4-FFF2-40B4-BE49-F238E27FC236}">
-                <a16:creationId xmlns:a16="http://schemas.microsoft.com/office/drawing/2014/main" id="{9BB10536-46E1-4FE6-B408-777C3B3700C3}"/>
-              </a:ext>
-            </a:extLst>
-          </p:cNvPr>
-          <p:cNvSpPr/>
-          <p:nvPr/>
-        </p:nvSpPr>
-        <p:spPr>
-          <a:xfrm>
-            <a:off x="987552" y="4562856"/>
-            <a:ext cx="7589520" cy="256032"/>
-          </a:xfrm>
-          <a:prstGeom prst="rect">
-            <a:avLst/>
-          </a:prstGeom>
-          <a:noFill/>
-          <a:ln/>
-        </p:spPr>
-        <p:txBody>
-          <a:bodyPr wrap="square" lIns="0" tIns="0" rIns="0" bIns="0" rtlCol="0" anchor="ctr"/>
-          <a:lstStyle/>
-          <a:p>
-            <a:pPr marL="0" indent="0">
-              <a:buNone/>
-            </a:pPr>
-            <a:r>
-              <a:rPr lang="en-US" sz="1050" dirty="0">
-                <a:solidFill>
-                  <a:srgbClr val="555555"/>
-                </a:solidFill>
-                <a:latin typeface="Archivo" panose="020B0604020202020204" charset="0"/>
-                <a:ea typeface="Calibri" pitchFamily="34" charset="-122"/>
-                <a:cs typeface="Archivo" panose="020B0604020202020204" charset="0"/>
-              </a:rPr>
-              <a:t>Monthly static PDFs take days - stakeholders need live dashboards</a:t>
-            </a:r>
-            <a:endParaRPr lang="en-US" sz="1050" dirty="0">
-              <a:latin typeface="Archivo" panose="020B0604020202020204" charset="0"/>
-              <a:cs typeface="Archivo" panose="020B0604020202020204" charset="0"/>
             </a:endParaRPr>
           </a:p>
         </p:txBody>
